--- a/PS91_Presentation.pptx
+++ b/PS91_Presentation.pptx
@@ -15,12 +15,6 @@
     <p:sldId id="263" r:id="rId14"/>
     <p:sldId id="264" r:id="rId15"/>
     <p:sldId id="265" r:id="rId16"/>
-    <p:sldId id="266" r:id="rId17"/>
-    <p:sldId id="267" r:id="rId18"/>
-    <p:sldId id="268" r:id="rId19"/>
-    <p:sldId id="269" r:id="rId20"/>
-    <p:sldId id="270" r:id="rId21"/>
-    <p:sldId id="271" r:id="rId22"/>
   </p:sldIdLst>
   <p:sldSz cx="12191695" cy="6858000" type="screen4x3"/>
   <p:notesSz cx="6858000" cy="9144000"/>
@@ -3155,7 +3149,7 @@
         </p:nvSpPr>
         <p:spPr>
           <a:xfrm>
-            <a:off x="658368" y="1920240"/>
+            <a:off x="658368" y="1874519"/>
             <a:ext cx="10874959" cy="365760"/>
           </a:xfrm>
           <a:prstGeom prst="rect">
@@ -3194,8 +3188,8 @@
         </p:nvSpPr>
         <p:spPr>
           <a:xfrm>
-            <a:off x="658368" y="2450592"/>
-            <a:ext cx="9692640" cy="1828800"/>
+            <a:off x="658368" y="2395728"/>
+            <a:ext cx="10058400" cy="1920240"/>
           </a:xfrm>
           <a:prstGeom prst="rect">
             <a:avLst/>
@@ -3210,17 +3204,17 @@
           <a:p>
             <a:pPr algn="l">
               <a:spcAft>
-                <a:spcPts val="200"/>
-              </a:spcAft>
-            </a:pPr>
-            <a:r>
-              <a:rPr sz="5000" b="1" i="0">
+                <a:spcPts val="600"/>
+              </a:spcAft>
+            </a:pPr>
+            <a:r>
+              <a:rPr sz="5400" b="1" i="0">
                 <a:solidFill>
                   <a:srgbClr val="FFFFFF"/>
                 </a:solidFill>
                 <a:latin typeface="Arial"/>
               </a:rPr>
-              <a:t>Will your train</a:t>
+              <a:t>RailSure</a:t>
             </a:r>
           </a:p>
           <a:p>
@@ -3230,13 +3224,13 @@
               </a:spcAft>
             </a:pPr>
             <a:r>
-              <a:rPr sz="5000" b="1" i="0">
-                <a:solidFill>
-                  <a:srgbClr val="FFFFFF"/>
-                </a:solidFill>
-                <a:latin typeface="Arial"/>
-              </a:rPr>
-              <a:t>ticket actually work?</a:t>
+              <a:rPr sz="2600" b="0" i="0">
+                <a:solidFill>
+                  <a:srgbClr val="CBD5E1"/>
+                </a:solidFill>
+                <a:latin typeface="Arial"/>
+              </a:rPr>
+              <a:t>Journey confidence for Indian Railways</a:t>
             </a:r>
           </a:p>
         </p:txBody>
@@ -3249,8 +3243,8 @@
         </p:nvSpPr>
         <p:spPr>
           <a:xfrm>
-            <a:off x="658368" y="4343400"/>
-            <a:ext cx="8778240" cy="822960"/>
+            <a:off x="658368" y="4434840"/>
+            <a:ext cx="9326880" cy="914400"/>
           </a:xfrm>
           <a:prstGeom prst="rect">
             <a:avLst/>
@@ -3269,13 +3263,13 @@
               </a:spcAft>
             </a:pPr>
             <a:r>
-              <a:rPr sz="1700" b="0" i="0">
+              <a:rPr sz="1600" b="0" i="0">
                 <a:solidFill>
                   <a:srgbClr val="CBD5E1"/>
                 </a:solidFill>
                 <a:latin typeface="Arial"/>
               </a:rPr>
-              <a:t>Confirmation probability for waitlisted tickets, plus connecting-journey</a:t>
+              <a:t>One platform that tells passengers whether their ticket will confirm and whether</a:t>
             </a:r>
           </a:p>
           <a:p>
@@ -3285,13 +3279,13 @@
               </a:spcAft>
             </a:pPr>
             <a:r>
-              <a:rPr sz="1700" b="0" i="0">
+              <a:rPr sz="1600" b="0" i="0">
                 <a:solidFill>
                   <a:srgbClr val="CBD5E1"/>
                 </a:solidFill>
                 <a:latin typeface="Arial"/>
               </a:rPr>
-              <a:t>planning with the risk of missing your next train.</a:t>
+              <a:t>they will make their connection — and tells railway staff who is about to miss one.</a:t>
             </a:r>
           </a:p>
         </p:txBody>
@@ -3304,7 +3298,7 @@
         </p:nvSpPr>
         <p:spPr>
           <a:xfrm>
-            <a:off x="658368" y="5440680"/>
+            <a:off x="658368" y="5532120"/>
             <a:ext cx="2011680" cy="38100"/>
           </a:xfrm>
           <a:prstGeom prst="rect">
@@ -3348,8 +3342,8 @@
         </p:nvSpPr>
         <p:spPr>
           <a:xfrm>
-            <a:off x="658368" y="5669280"/>
-            <a:ext cx="10058400" cy="548640"/>
+            <a:off x="658368" y="5760720"/>
+            <a:ext cx="10058400" cy="457200"/>
           </a:xfrm>
           <a:prstGeom prst="rect">
             <a:avLst/>
@@ -3364,33 +3358,17 @@
           <a:p>
             <a:pPr algn="l">
               <a:spcAft>
-                <a:spcPts val="300"/>
-              </a:spcAft>
-            </a:pPr>
-            <a:r>
-              <a:rPr sz="1300" b="0" i="0">
-                <a:solidFill>
-                  <a:srgbClr val="FFFFFF"/>
-                </a:solidFill>
-                <a:latin typeface="Arial"/>
-              </a:rPr>
-              <a:t>irctc-smoky.vercel.app</a:t>
-            </a:r>
-          </a:p>
-          <a:p>
-            <a:pPr>
-              <a:spcAft>
                 <a:spcPts val="0"/>
               </a:spcAft>
             </a:pPr>
             <a:r>
-              <a:rPr sz="1300" b="0" i="0">
+              <a:rPr sz="1200" b="0" i="0">
                 <a:solidFill>
                   <a:srgbClr val="64748B"/>
                 </a:solidFill>
                 <a:latin typeface="Arial"/>
               </a:rPr>
-              <a:t>github.com/mohammadamir0762-arch/irctc</a:t>
+              <a:t>irctc-smoky.vercel.app     ·     github.com/mohammadamir0762-arch/irctc</a:t>
             </a:r>
           </a:p>
         </p:txBody>
@@ -3428,2014 +3406,6 @@
             <a:avLst/>
           </a:prstGeom>
           <a:solidFill>
-            <a:srgbClr val="FFFFFF"/>
-          </a:solidFill>
-          <a:ln>
-            <a:noFill/>
-          </a:ln>
-          <a:effectLst/>
-        </p:spPr>
-        <p:style>
-          <a:lnRef idx="1">
-            <a:schemeClr val="accent1"/>
-          </a:lnRef>
-          <a:fillRef idx="3">
-            <a:schemeClr val="accent1"/>
-          </a:fillRef>
-          <a:effectRef idx="2">
-            <a:schemeClr val="accent1"/>
-          </a:effectRef>
-          <a:fontRef idx="minor">
-            <a:schemeClr val="lt1"/>
-          </a:fontRef>
-        </p:style>
-        <p:txBody>
-          <a:bodyPr rtlCol="0" anchor="ctr"/>
-          <a:lstStyle/>
-          <a:p>
-            <a:pPr algn="ctr"/>
-          </a:p>
-        </p:txBody>
-      </p:sp>
-      <p:sp>
-        <p:nvSpPr>
-          <p:cNvPr id="3" name="TextBox 2"/>
-          <p:cNvSpPr txBox="1"/>
-          <p:nvPr/>
-        </p:nvSpPr>
-        <p:spPr>
-          <a:xfrm>
-            <a:off x="658368" y="457200"/>
-            <a:ext cx="10874959" cy="274320"/>
-          </a:xfrm>
-          <a:prstGeom prst="rect">
-            <a:avLst/>
-          </a:prstGeom>
-          <a:noFill/>
-        </p:spPr>
-        <p:txBody>
-          <a:bodyPr wrap="square" anchor="t">
-            <a:spAutoFit/>
-          </a:bodyPr>
-          <a:lstStyle/>
-          <a:p>
-            <a:pPr algn="l">
-              <a:spcAft>
-                <a:spcPts val="0"/>
-              </a:spcAft>
-            </a:pPr>
-            <a:r>
-              <a:rPr sz="1100" b="1" i="0">
-                <a:solidFill>
-                  <a:srgbClr val="64748B"/>
-                </a:solidFill>
-                <a:latin typeface="Arial"/>
-              </a:rPr>
-              <a:t>METHOD</a:t>
-            </a:r>
-          </a:p>
-        </p:txBody>
-      </p:sp>
-      <p:sp>
-        <p:nvSpPr>
-          <p:cNvPr id="4" name="TextBox 3"/>
-          <p:cNvSpPr txBox="1"/>
-          <p:nvPr/>
-        </p:nvSpPr>
-        <p:spPr>
-          <a:xfrm>
-            <a:off x="658368" y="768096"/>
-            <a:ext cx="10874959" cy="548640"/>
-          </a:xfrm>
-          <a:prstGeom prst="rect">
-            <a:avLst/>
-          </a:prstGeom>
-          <a:noFill/>
-        </p:spPr>
-        <p:txBody>
-          <a:bodyPr wrap="square" anchor="t">
-            <a:spAutoFit/>
-          </a:bodyPr>
-          <a:lstStyle/>
-          <a:p>
-            <a:pPr algn="l">
-              <a:spcAft>
-                <a:spcPts val="0"/>
-              </a:spcAft>
-            </a:pPr>
-            <a:r>
-              <a:rPr sz="3000" b="1" i="0">
-                <a:solidFill>
-                  <a:srgbClr val="0F172A"/>
-                </a:solidFill>
-                <a:latin typeface="Arial"/>
-              </a:rPr>
-              <a:t>Scoring a connection</a:t>
-            </a:r>
-          </a:p>
-        </p:txBody>
-      </p:sp>
-      <p:sp>
-        <p:nvSpPr>
-          <p:cNvPr id="5" name="Rectangle 4"/>
-          <p:cNvSpPr/>
-          <p:nvPr/>
-        </p:nvSpPr>
-        <p:spPr>
-          <a:xfrm>
-            <a:off x="658368" y="1371600"/>
-            <a:ext cx="1005840" cy="38100"/>
-          </a:xfrm>
-          <a:prstGeom prst="rect">
-            <a:avLst/>
-          </a:prstGeom>
-          <a:solidFill>
-            <a:srgbClr val="0EA5E9"/>
-          </a:solidFill>
-          <a:ln>
-            <a:noFill/>
-          </a:ln>
-          <a:effectLst/>
-        </p:spPr>
-        <p:style>
-          <a:lnRef idx="1">
-            <a:schemeClr val="accent1"/>
-          </a:lnRef>
-          <a:fillRef idx="3">
-            <a:schemeClr val="accent1"/>
-          </a:fillRef>
-          <a:effectRef idx="2">
-            <a:schemeClr val="accent1"/>
-          </a:effectRef>
-          <a:fontRef idx="minor">
-            <a:schemeClr val="lt1"/>
-          </a:fontRef>
-        </p:style>
-        <p:txBody>
-          <a:bodyPr rtlCol="0" anchor="ctr"/>
-          <a:lstStyle/>
-          <a:p>
-            <a:pPr algn="ctr"/>
-          </a:p>
-        </p:txBody>
-      </p:sp>
-      <p:sp>
-        <p:nvSpPr>
-          <p:cNvPr id="6" name="TextBox 5"/>
-          <p:cNvSpPr txBox="1"/>
-          <p:nvPr/>
-        </p:nvSpPr>
-        <p:spPr>
-          <a:xfrm>
-            <a:off x="658368" y="1700784"/>
-            <a:ext cx="5486400" cy="4023360"/>
-          </a:xfrm>
-          <a:prstGeom prst="rect">
-            <a:avLst/>
-          </a:prstGeom>
-          <a:noFill/>
-        </p:spPr>
-        <p:txBody>
-          <a:bodyPr wrap="square" anchor="t">
-            <a:spAutoFit/>
-          </a:bodyPr>
-          <a:lstStyle/>
-          <a:p>
-            <a:pPr algn="l">
-              <a:spcAft>
-                <a:spcPts val="1200"/>
-              </a:spcAft>
-            </a:pPr>
-            <a:r>
-              <a:rPr sz="1700" b="1" i="0">
-                <a:solidFill>
-                  <a:srgbClr val="0F172A"/>
-                </a:solidFill>
-                <a:latin typeface="Arial"/>
-              </a:rPr>
-              <a:t>A two-leg journey has three ways to fail</a:t>
-            </a:r>
-          </a:p>
-          <a:p>
-            <a:pPr>
-              <a:spcAft>
-                <a:spcPts val="200"/>
-              </a:spcAft>
-            </a:pPr>
-            <a:r>
-              <a:rPr sz="1500" b="1" i="0">
-                <a:solidFill>
-                  <a:srgbClr val="0F172A"/>
-                </a:solidFill>
-                <a:latin typeface="Arial"/>
-              </a:rPr>
-              <a:t>1.   Leg one does not confirm</a:t>
-            </a:r>
-          </a:p>
-          <a:p>
-            <a:pPr>
-              <a:spcAft>
-                <a:spcPts val="1200"/>
-              </a:spcAft>
-            </a:pPr>
-            <a:r>
-              <a:rPr sz="1400" b="0" i="0">
-                <a:solidFill>
-                  <a:srgbClr val="64748B"/>
-                </a:solidFill>
-                <a:latin typeface="Arial"/>
-              </a:rPr>
-              <a:t>Handled by the confirmation model.</a:t>
-            </a:r>
-          </a:p>
-          <a:p>
-            <a:pPr>
-              <a:spcAft>
-                <a:spcPts val="200"/>
-              </a:spcAft>
-            </a:pPr>
-            <a:r>
-              <a:rPr sz="1500" b="1" i="0">
-                <a:solidFill>
-                  <a:srgbClr val="0F172A"/>
-                </a:solidFill>
-                <a:latin typeface="Arial"/>
-              </a:rPr>
-              <a:t>2.   Leg two does not confirm</a:t>
-            </a:r>
-          </a:p>
-          <a:p>
-            <a:pPr>
-              <a:spcAft>
-                <a:spcPts val="1200"/>
-              </a:spcAft>
-            </a:pPr>
-            <a:r>
-              <a:rPr sz="1400" b="0" i="0">
-                <a:solidFill>
-                  <a:srgbClr val="64748B"/>
-                </a:solidFill>
-                <a:latin typeface="Arial"/>
-              </a:rPr>
-              <a:t>Same model, scored independently.</a:t>
-            </a:r>
-          </a:p>
-          <a:p>
-            <a:pPr>
-              <a:spcAft>
-                <a:spcPts val="200"/>
-              </a:spcAft>
-            </a:pPr>
-            <a:r>
-              <a:rPr sz="1500" b="1" i="0">
-                <a:solidFill>
-                  <a:srgbClr val="0F172A"/>
-                </a:solidFill>
-                <a:latin typeface="Arial"/>
-              </a:rPr>
-              <a:t>3.   Leg one arrives too late for leg two</a:t>
-            </a:r>
-          </a:p>
-          <a:p>
-            <a:pPr>
-              <a:spcAft>
-                <a:spcPts val="0"/>
-              </a:spcAft>
-            </a:pPr>
-            <a:r>
-              <a:rPr sz="1400" b="0" i="0">
-                <a:solidFill>
-                  <a:srgbClr val="64748B"/>
-                </a:solidFill>
-                <a:latin typeface="Arial"/>
-              </a:rPr>
-              <a:t>Compare the first train's historical delay distribution against the layover time at the interchange station.</a:t>
-            </a:r>
-          </a:p>
-        </p:txBody>
-      </p:sp>
-      <p:sp>
-        <p:nvSpPr>
-          <p:cNvPr id="7" name="TextBox 6"/>
-          <p:cNvSpPr txBox="1"/>
-          <p:nvPr/>
-        </p:nvSpPr>
-        <p:spPr>
-          <a:xfrm>
-            <a:off x="6601968" y="1700784"/>
-            <a:ext cx="4572000" cy="4023360"/>
-          </a:xfrm>
-          <a:prstGeom prst="rect">
-            <a:avLst/>
-          </a:prstGeom>
-          <a:noFill/>
-        </p:spPr>
-        <p:txBody>
-          <a:bodyPr wrap="square" anchor="t">
-            <a:spAutoFit/>
-          </a:bodyPr>
-          <a:lstStyle/>
-          <a:p>
-            <a:pPr algn="l">
-              <a:spcAft>
-                <a:spcPts val="1200"/>
-              </a:spcAft>
-            </a:pPr>
-            <a:r>
-              <a:rPr sz="1000" b="1" i="0">
-                <a:solidFill>
-                  <a:srgbClr val="0EA5E9"/>
-                </a:solidFill>
-                <a:latin typeface="Arial"/>
-              </a:rPr>
-              <a:t>WHAT THE DELAY DATA GIVES US</a:t>
-            </a:r>
-          </a:p>
-          <a:p>
-            <a:pPr>
-              <a:spcAft>
-                <a:spcPts val="400"/>
-              </a:spcAft>
-            </a:pPr>
-            <a:r>
-              <a:rPr sz="1700" b="1" i="0">
-                <a:solidFill>
-                  <a:srgbClr val="0F172A"/>
-                </a:solidFill>
-                <a:latin typeface="Arial"/>
-              </a:rPr>
-              <a:t>Median delay   25 min</a:t>
-            </a:r>
-          </a:p>
-          <a:p>
-            <a:pPr>
-              <a:spcAft>
-                <a:spcPts val="1200"/>
-              </a:spcAft>
-            </a:pPr>
-            <a:r>
-              <a:rPr sz="1300" b="0" i="0">
-                <a:solidFill>
-                  <a:srgbClr val="64748B"/>
-                </a:solidFill>
-                <a:latin typeface="Arial"/>
-              </a:rPr>
-              <a:t>Half of journeys arrive within this.</a:t>
-            </a:r>
-          </a:p>
-          <a:p>
-            <a:pPr>
-              <a:spcAft>
-                <a:spcPts val="400"/>
-              </a:spcAft>
-            </a:pPr>
-            <a:r>
-              <a:rPr sz="1700" b="1" i="0">
-                <a:solidFill>
-                  <a:srgbClr val="0F172A"/>
-                </a:solidFill>
-                <a:latin typeface="Arial"/>
-              </a:rPr>
-              <a:t>27% of journeys delayed 50 min or more</a:t>
-            </a:r>
-          </a:p>
-          <a:p>
-            <a:pPr>
-              <a:spcAft>
-                <a:spcPts val="1200"/>
-              </a:spcAft>
-            </a:pPr>
-            <a:r>
-              <a:rPr sz="1300" b="0" i="0">
-                <a:solidFill>
-                  <a:srgbClr val="64748B"/>
-                </a:solidFill>
-                <a:latin typeface="Arial"/>
-              </a:rPr>
-              <a:t>So a 50-minute layover fails roughly one time in four.</a:t>
-            </a:r>
-          </a:p>
-          <a:p>
-            <a:pPr>
-              <a:spcAft>
-                <a:spcPts val="400"/>
-              </a:spcAft>
-            </a:pPr>
-            <a:r>
-              <a:rPr sz="1700" b="1" i="0">
-                <a:solidFill>
-                  <a:srgbClr val="0F172A"/>
-                </a:solidFill>
-                <a:latin typeface="Arial"/>
-              </a:rPr>
-              <a:t>Longest observed   244 min</a:t>
-            </a:r>
-          </a:p>
-          <a:p>
-            <a:pPr>
-              <a:spcAft>
-                <a:spcPts val="0"/>
-              </a:spcAft>
-            </a:pPr>
-            <a:r>
-              <a:rPr sz="1300" b="0" i="0">
-                <a:solidFill>
-                  <a:srgbClr val="64748B"/>
-                </a:solidFill>
-                <a:latin typeface="Arial"/>
-              </a:rPr>
-              <a:t>No realistic buffer survives the tail — which is exactly why it should be shown as a probability, not hidden.</a:t>
-            </a:r>
-          </a:p>
-        </p:txBody>
-      </p:sp>
-      <p:sp>
-        <p:nvSpPr>
-          <p:cNvPr id="8" name="TextBox 7"/>
-          <p:cNvSpPr txBox="1"/>
-          <p:nvPr/>
-        </p:nvSpPr>
-        <p:spPr>
-          <a:xfrm>
-            <a:off x="658368" y="6126480"/>
-            <a:ext cx="10874959" cy="365760"/>
-          </a:xfrm>
-          <a:prstGeom prst="rect">
-            <a:avLst/>
-          </a:prstGeom>
-          <a:noFill/>
-        </p:spPr>
-        <p:txBody>
-          <a:bodyPr wrap="square" anchor="t">
-            <a:spAutoFit/>
-          </a:bodyPr>
-          <a:lstStyle/>
-          <a:p>
-            <a:pPr algn="l">
-              <a:spcAft>
-                <a:spcPts val="0"/>
-              </a:spcAft>
-            </a:pPr>
-            <a:r>
-              <a:rPr sz="1100" b="0" i="1">
-                <a:solidFill>
-                  <a:srgbClr val="64748B"/>
-                </a:solidFill>
-                <a:latin typeface="Arial"/>
-              </a:rPr>
-              <a:t>Delay figures from an exploratory study of 100 journey records, 2016–2025.</a:t>
-            </a:r>
-          </a:p>
-        </p:txBody>
-      </p:sp>
-    </p:spTree>
-  </p:cSld>
-  <p:clrMapOvr>
-    <a:masterClrMapping/>
-  </p:clrMapOvr>
-</p:sld>
-</file>
-
-<file path=ppt/slides/slide11.xml><?xml version="1.0" encoding="utf-8"?>
-<p:sld xmlns:a="http://schemas.openxmlformats.org/drawingml/2006/main" xmlns:p="http://schemas.openxmlformats.org/presentationml/2006/main" xmlns:r="http://schemas.openxmlformats.org/officeDocument/2006/relationships">
-  <p:cSld>
-    <p:spTree>
-      <p:nvGrpSpPr>
-        <p:cNvPr id="1" name=""/>
-        <p:cNvGrpSpPr/>
-        <p:nvPr/>
-      </p:nvGrpSpPr>
-      <p:grpSpPr/>
-      <p:sp>
-        <p:nvSpPr>
-          <p:cNvPr id="2" name="Rectangle 1"/>
-          <p:cNvSpPr/>
-          <p:nvPr/>
-        </p:nvSpPr>
-        <p:spPr>
-          <a:xfrm>
-            <a:off x="0" y="0"/>
-            <a:ext cx="12191695" cy="6858000"/>
-          </a:xfrm>
-          <a:prstGeom prst="rect">
-            <a:avLst/>
-          </a:prstGeom>
-          <a:solidFill>
-            <a:srgbClr val="FFFFFF"/>
-          </a:solidFill>
-          <a:ln>
-            <a:noFill/>
-          </a:ln>
-          <a:effectLst/>
-        </p:spPr>
-        <p:style>
-          <a:lnRef idx="1">
-            <a:schemeClr val="accent1"/>
-          </a:lnRef>
-          <a:fillRef idx="3">
-            <a:schemeClr val="accent1"/>
-          </a:fillRef>
-          <a:effectRef idx="2">
-            <a:schemeClr val="accent1"/>
-          </a:effectRef>
-          <a:fontRef idx="minor">
-            <a:schemeClr val="lt1"/>
-          </a:fontRef>
-        </p:style>
-        <p:txBody>
-          <a:bodyPr rtlCol="0" anchor="ctr"/>
-          <a:lstStyle/>
-          <a:p>
-            <a:pPr algn="ctr"/>
-          </a:p>
-        </p:txBody>
-      </p:sp>
-      <p:sp>
-        <p:nvSpPr>
-          <p:cNvPr id="3" name="TextBox 2"/>
-          <p:cNvSpPr txBox="1"/>
-          <p:nvPr/>
-        </p:nvSpPr>
-        <p:spPr>
-          <a:xfrm>
-            <a:off x="658368" y="457200"/>
-            <a:ext cx="10874959" cy="274320"/>
-          </a:xfrm>
-          <a:prstGeom prst="rect">
-            <a:avLst/>
-          </a:prstGeom>
-          <a:noFill/>
-        </p:spPr>
-        <p:txBody>
-          <a:bodyPr wrap="square" anchor="t">
-            <a:spAutoFit/>
-          </a:bodyPr>
-          <a:lstStyle/>
-          <a:p>
-            <a:pPr algn="l">
-              <a:spcAft>
-                <a:spcPts val="0"/>
-              </a:spcAft>
-            </a:pPr>
-            <a:r>
-              <a:rPr sz="1100" b="1" i="0">
-                <a:solidFill>
-                  <a:srgbClr val="64748B"/>
-                </a:solidFill>
-                <a:latin typeface="Arial"/>
-              </a:rPr>
-              <a:t>DELAY ANALYSIS</a:t>
-            </a:r>
-          </a:p>
-        </p:txBody>
-      </p:sp>
-      <p:sp>
-        <p:nvSpPr>
-          <p:cNvPr id="4" name="TextBox 3"/>
-          <p:cNvSpPr txBox="1"/>
-          <p:nvPr/>
-        </p:nvSpPr>
-        <p:spPr>
-          <a:xfrm>
-            <a:off x="658368" y="768096"/>
-            <a:ext cx="10874959" cy="548640"/>
-          </a:xfrm>
-          <a:prstGeom prst="rect">
-            <a:avLst/>
-          </a:prstGeom>
-          <a:noFill/>
-        </p:spPr>
-        <p:txBody>
-          <a:bodyPr wrap="square" anchor="t">
-            <a:spAutoFit/>
-          </a:bodyPr>
-          <a:lstStyle/>
-          <a:p>
-            <a:pPr algn="l">
-              <a:spcAft>
-                <a:spcPts val="0"/>
-              </a:spcAft>
-            </a:pPr>
-            <a:r>
-              <a:rPr sz="3000" b="1" i="0">
-                <a:solidFill>
-                  <a:srgbClr val="0F172A"/>
-                </a:solidFill>
-                <a:latin typeface="Arial"/>
-              </a:rPr>
-              <a:t>How late do trains actually run?</a:t>
-            </a:r>
-          </a:p>
-        </p:txBody>
-      </p:sp>
-      <p:sp>
-        <p:nvSpPr>
-          <p:cNvPr id="5" name="Rectangle 4"/>
-          <p:cNvSpPr/>
-          <p:nvPr/>
-        </p:nvSpPr>
-        <p:spPr>
-          <a:xfrm>
-            <a:off x="658368" y="1371600"/>
-            <a:ext cx="1005840" cy="38100"/>
-          </a:xfrm>
-          <a:prstGeom prst="rect">
-            <a:avLst/>
-          </a:prstGeom>
-          <a:solidFill>
-            <a:srgbClr val="0EA5E9"/>
-          </a:solidFill>
-          <a:ln>
-            <a:noFill/>
-          </a:ln>
-          <a:effectLst/>
-        </p:spPr>
-        <p:style>
-          <a:lnRef idx="1">
-            <a:schemeClr val="accent1"/>
-          </a:lnRef>
-          <a:fillRef idx="3">
-            <a:schemeClr val="accent1"/>
-          </a:fillRef>
-          <a:effectRef idx="2">
-            <a:schemeClr val="accent1"/>
-          </a:effectRef>
-          <a:fontRef idx="minor">
-            <a:schemeClr val="lt1"/>
-          </a:fontRef>
-        </p:style>
-        <p:txBody>
-          <a:bodyPr rtlCol="0" anchor="ctr"/>
-          <a:lstStyle/>
-          <a:p>
-            <a:pPr algn="ctr"/>
-          </a:p>
-        </p:txBody>
-      </p:sp>
-      <p:pic>
-        <p:nvPicPr>
-          <p:cNvPr id="6" name="Picture 5" descr="01_delay_distribution.png"/>
-          <p:cNvPicPr>
-            <a:picLocks noChangeAspect="1"/>
-          </p:cNvPicPr>
-          <p:nvPr/>
-        </p:nvPicPr>
-        <p:blipFill>
-          <a:blip r:embed="rId2"/>
-          <a:stretch>
-            <a:fillRect/>
-          </a:stretch>
-        </p:blipFill>
-        <p:spPr>
-          <a:xfrm>
-            <a:off x="658368" y="1920044"/>
-            <a:ext cx="6949440" cy="4032896"/>
-          </a:xfrm>
-          <a:prstGeom prst="rect">
-            <a:avLst/>
-          </a:prstGeom>
-        </p:spPr>
-      </p:pic>
-      <p:sp>
-        <p:nvSpPr>
-          <p:cNvPr id="7" name="TextBox 6"/>
-          <p:cNvSpPr txBox="1"/>
-          <p:nvPr/>
-        </p:nvSpPr>
-        <p:spPr>
-          <a:xfrm>
-            <a:off x="7973568" y="1792224"/>
-            <a:ext cx="3559759" cy="4471416"/>
-          </a:xfrm>
-          <a:prstGeom prst="rect">
-            <a:avLst/>
-          </a:prstGeom>
-          <a:noFill/>
-        </p:spPr>
-        <p:txBody>
-          <a:bodyPr wrap="square" anchor="t">
-            <a:spAutoFit/>
-          </a:bodyPr>
-          <a:lstStyle/>
-          <a:p>
-            <a:pPr algn="l">
-              <a:spcAft>
-                <a:spcPts val="800"/>
-              </a:spcAft>
-            </a:pPr>
-            <a:r>
-              <a:rPr sz="1000" b="1" i="0">
-                <a:solidFill>
-                  <a:srgbClr val="0EA5E9"/>
-                </a:solidFill>
-                <a:latin typeface="Arial"/>
-              </a:rPr>
-              <a:t>WHY IT MATTERS</a:t>
-            </a:r>
-          </a:p>
-          <a:p>
-            <a:pPr>
-              <a:spcAft>
-                <a:spcPts val="1000"/>
-              </a:spcAft>
-            </a:pPr>
-            <a:r>
-              <a:rPr sz="1400" b="1" i="0">
-                <a:solidFill>
-                  <a:srgbClr val="0F172A"/>
-                </a:solidFill>
-                <a:latin typeface="Arial"/>
-              </a:rPr>
-              <a:t>This curve is the buffer calculator.</a:t>
-            </a:r>
-          </a:p>
-          <a:p>
-            <a:pPr>
-              <a:spcAft>
-                <a:spcPts val="1000"/>
-              </a:spcAft>
-            </a:pPr>
-            <a:r>
-              <a:rPr sz="1400" b="0" i="0">
-                <a:solidFill>
-                  <a:srgbClr val="64748B"/>
-                </a:solidFill>
-                <a:latin typeface="Arial"/>
-              </a:rPr>
-              <a:t>Most journeys are under 50 minutes late, but a long tail reaches 244 minutes.</a:t>
-            </a:r>
-          </a:p>
-          <a:p>
-            <a:pPr>
-              <a:spcAft>
-                <a:spcPts val="1000"/>
-              </a:spcAft>
-            </a:pPr>
-            <a:r>
-              <a:rPr sz="1400" b="0" i="0">
-                <a:solidFill>
-                  <a:srgbClr val="64748B"/>
-                </a:solidFill>
-                <a:latin typeface="Arial"/>
-              </a:rPr>
-              <a:t>For any layover, the area to the right of it is the probability of missing the connection.</a:t>
-            </a:r>
-          </a:p>
-        </p:txBody>
-      </p:sp>
-    </p:spTree>
-  </p:cSld>
-  <p:clrMapOvr>
-    <a:masterClrMapping/>
-  </p:clrMapOvr>
-</p:sld>
-</file>
-
-<file path=ppt/slides/slide12.xml><?xml version="1.0" encoding="utf-8"?>
-<p:sld xmlns:a="http://schemas.openxmlformats.org/drawingml/2006/main" xmlns:p="http://schemas.openxmlformats.org/presentationml/2006/main" xmlns:r="http://schemas.openxmlformats.org/officeDocument/2006/relationships">
-  <p:cSld>
-    <p:spTree>
-      <p:nvGrpSpPr>
-        <p:cNvPr id="1" name=""/>
-        <p:cNvGrpSpPr/>
-        <p:nvPr/>
-      </p:nvGrpSpPr>
-      <p:grpSpPr/>
-      <p:sp>
-        <p:nvSpPr>
-          <p:cNvPr id="2" name="Rectangle 1"/>
-          <p:cNvSpPr/>
-          <p:nvPr/>
-        </p:nvSpPr>
-        <p:spPr>
-          <a:xfrm>
-            <a:off x="0" y="0"/>
-            <a:ext cx="12191695" cy="6858000"/>
-          </a:xfrm>
-          <a:prstGeom prst="rect">
-            <a:avLst/>
-          </a:prstGeom>
-          <a:solidFill>
-            <a:srgbClr val="FFFFFF"/>
-          </a:solidFill>
-          <a:ln>
-            <a:noFill/>
-          </a:ln>
-          <a:effectLst/>
-        </p:spPr>
-        <p:style>
-          <a:lnRef idx="1">
-            <a:schemeClr val="accent1"/>
-          </a:lnRef>
-          <a:fillRef idx="3">
-            <a:schemeClr val="accent1"/>
-          </a:fillRef>
-          <a:effectRef idx="2">
-            <a:schemeClr val="accent1"/>
-          </a:effectRef>
-          <a:fontRef idx="minor">
-            <a:schemeClr val="lt1"/>
-          </a:fontRef>
-        </p:style>
-        <p:txBody>
-          <a:bodyPr rtlCol="0" anchor="ctr"/>
-          <a:lstStyle/>
-          <a:p>
-            <a:pPr algn="ctr"/>
-          </a:p>
-        </p:txBody>
-      </p:sp>
-      <p:sp>
-        <p:nvSpPr>
-          <p:cNvPr id="3" name="TextBox 2"/>
-          <p:cNvSpPr txBox="1"/>
-          <p:nvPr/>
-        </p:nvSpPr>
-        <p:spPr>
-          <a:xfrm>
-            <a:off x="658368" y="457200"/>
-            <a:ext cx="10874959" cy="274320"/>
-          </a:xfrm>
-          <a:prstGeom prst="rect">
-            <a:avLst/>
-          </a:prstGeom>
-          <a:noFill/>
-        </p:spPr>
-        <p:txBody>
-          <a:bodyPr wrap="square" anchor="t">
-            <a:spAutoFit/>
-          </a:bodyPr>
-          <a:lstStyle/>
-          <a:p>
-            <a:pPr algn="l">
-              <a:spcAft>
-                <a:spcPts val="0"/>
-              </a:spcAft>
-            </a:pPr>
-            <a:r>
-              <a:rPr sz="1100" b="1" i="0">
-                <a:solidFill>
-                  <a:srgbClr val="64748B"/>
-                </a:solidFill>
-                <a:latin typeface="Arial"/>
-              </a:rPr>
-              <a:t>DELAY ANALYSIS</a:t>
-            </a:r>
-          </a:p>
-        </p:txBody>
-      </p:sp>
-      <p:sp>
-        <p:nvSpPr>
-          <p:cNvPr id="4" name="TextBox 3"/>
-          <p:cNvSpPr txBox="1"/>
-          <p:nvPr/>
-        </p:nvSpPr>
-        <p:spPr>
-          <a:xfrm>
-            <a:off x="658368" y="768096"/>
-            <a:ext cx="10874959" cy="548640"/>
-          </a:xfrm>
-          <a:prstGeom prst="rect">
-            <a:avLst/>
-          </a:prstGeom>
-          <a:noFill/>
-        </p:spPr>
-        <p:txBody>
-          <a:bodyPr wrap="square" anchor="t">
-            <a:spAutoFit/>
-          </a:bodyPr>
-          <a:lstStyle/>
-          <a:p>
-            <a:pPr algn="l">
-              <a:spcAft>
-                <a:spcPts val="0"/>
-              </a:spcAft>
-            </a:pPr>
-            <a:r>
-              <a:rPr sz="3000" b="1" i="0">
-                <a:solidFill>
-                  <a:srgbClr val="0F172A"/>
-                </a:solidFill>
-                <a:latin typeface="Arial"/>
-              </a:rPr>
-              <a:t>Baseline risk</a:t>
-            </a:r>
-          </a:p>
-        </p:txBody>
-      </p:sp>
-      <p:sp>
-        <p:nvSpPr>
-          <p:cNvPr id="5" name="Rectangle 4"/>
-          <p:cNvSpPr/>
-          <p:nvPr/>
-        </p:nvSpPr>
-        <p:spPr>
-          <a:xfrm>
-            <a:off x="658368" y="1371600"/>
-            <a:ext cx="1005840" cy="38100"/>
-          </a:xfrm>
-          <a:prstGeom prst="rect">
-            <a:avLst/>
-          </a:prstGeom>
-          <a:solidFill>
-            <a:srgbClr val="0EA5E9"/>
-          </a:solidFill>
-          <a:ln>
-            <a:noFill/>
-          </a:ln>
-          <a:effectLst/>
-        </p:spPr>
-        <p:style>
-          <a:lnRef idx="1">
-            <a:schemeClr val="accent1"/>
-          </a:lnRef>
-          <a:fillRef idx="3">
-            <a:schemeClr val="accent1"/>
-          </a:fillRef>
-          <a:effectRef idx="2">
-            <a:schemeClr val="accent1"/>
-          </a:effectRef>
-          <a:fontRef idx="minor">
-            <a:schemeClr val="lt1"/>
-          </a:fontRef>
-        </p:style>
-        <p:txBody>
-          <a:bodyPr rtlCol="0" anchor="ctr"/>
-          <a:lstStyle/>
-          <a:p>
-            <a:pPr algn="ctr"/>
-          </a:p>
-        </p:txBody>
-      </p:sp>
-      <p:pic>
-        <p:nvPicPr>
-          <p:cNvPr id="6" name="Picture 5" descr="04_ontime_performance.png"/>
-          <p:cNvPicPr>
-            <a:picLocks noChangeAspect="1"/>
-          </p:cNvPicPr>
-          <p:nvPr/>
-        </p:nvPicPr>
-        <p:blipFill>
-          <a:blip r:embed="rId2"/>
-          <a:stretch>
-            <a:fillRect/>
-          </a:stretch>
-        </p:blipFill>
-        <p:spPr>
-          <a:xfrm>
-            <a:off x="1961527" y="1700784"/>
-            <a:ext cx="4343122" cy="4471416"/>
-          </a:xfrm>
-          <a:prstGeom prst="rect">
-            <a:avLst/>
-          </a:prstGeom>
-        </p:spPr>
-      </p:pic>
-      <p:sp>
-        <p:nvSpPr>
-          <p:cNvPr id="7" name="TextBox 6"/>
-          <p:cNvSpPr txBox="1"/>
-          <p:nvPr/>
-        </p:nvSpPr>
-        <p:spPr>
-          <a:xfrm>
-            <a:off x="7973568" y="1792224"/>
-            <a:ext cx="3559759" cy="4471416"/>
-          </a:xfrm>
-          <a:prstGeom prst="rect">
-            <a:avLst/>
-          </a:prstGeom>
-          <a:noFill/>
-        </p:spPr>
-        <p:txBody>
-          <a:bodyPr wrap="square" anchor="t">
-            <a:spAutoFit/>
-          </a:bodyPr>
-          <a:lstStyle/>
-          <a:p>
-            <a:pPr algn="l">
-              <a:spcAft>
-                <a:spcPts val="800"/>
-              </a:spcAft>
-            </a:pPr>
-            <a:r>
-              <a:rPr sz="1000" b="1" i="0">
-                <a:solidFill>
-                  <a:srgbClr val="0EA5E9"/>
-                </a:solidFill>
-                <a:latin typeface="Arial"/>
-              </a:rPr>
-              <a:t>WHY IT MATTERS</a:t>
-            </a:r>
-          </a:p>
-          <a:p>
-            <a:pPr>
-              <a:spcAft>
-                <a:spcPts val="1000"/>
-              </a:spcAft>
-            </a:pPr>
-            <a:r>
-              <a:rPr sz="1400" b="1" i="0">
-                <a:solidFill>
-                  <a:srgbClr val="0F172A"/>
-                </a:solidFill>
-                <a:latin typeface="Arial"/>
-              </a:rPr>
-              <a:t>Arriving on time is the exception.</a:t>
-            </a:r>
-          </a:p>
-          <a:p>
-            <a:pPr>
-              <a:spcAft>
-                <a:spcPts val="1000"/>
-              </a:spcAft>
-            </a:pPr>
-            <a:r>
-              <a:rPr sz="1400" b="0" i="0">
-                <a:solidFill>
-                  <a:srgbClr val="64748B"/>
-                </a:solidFill>
-                <a:latin typeface="Arial"/>
-              </a:rPr>
-              <a:t>94 of 100 journeys in the sample were late.</a:t>
-            </a:r>
-          </a:p>
-          <a:p>
-            <a:pPr>
-              <a:spcAft>
-                <a:spcPts val="1000"/>
-              </a:spcAft>
-            </a:pPr>
-            <a:r>
-              <a:rPr sz="1400" b="0" i="0">
-                <a:solidFill>
-                  <a:srgbClr val="64748B"/>
-                </a:solidFill>
-                <a:latin typeface="Arial"/>
-              </a:rPr>
-              <a:t>A connection planned on the scheduled time is planning for the rare case.</a:t>
-            </a:r>
-          </a:p>
-        </p:txBody>
-      </p:sp>
-    </p:spTree>
-  </p:cSld>
-  <p:clrMapOvr>
-    <a:masterClrMapping/>
-  </p:clrMapOvr>
-</p:sld>
-</file>
-
-<file path=ppt/slides/slide13.xml><?xml version="1.0" encoding="utf-8"?>
-<p:sld xmlns:a="http://schemas.openxmlformats.org/drawingml/2006/main" xmlns:p="http://schemas.openxmlformats.org/presentationml/2006/main" xmlns:r="http://schemas.openxmlformats.org/officeDocument/2006/relationships">
-  <p:cSld>
-    <p:spTree>
-      <p:nvGrpSpPr>
-        <p:cNvPr id="1" name=""/>
-        <p:cNvGrpSpPr/>
-        <p:nvPr/>
-      </p:nvGrpSpPr>
-      <p:grpSpPr/>
-      <p:sp>
-        <p:nvSpPr>
-          <p:cNvPr id="2" name="Rectangle 1"/>
-          <p:cNvSpPr/>
-          <p:nvPr/>
-        </p:nvSpPr>
-        <p:spPr>
-          <a:xfrm>
-            <a:off x="0" y="0"/>
-            <a:ext cx="12191695" cy="6858000"/>
-          </a:xfrm>
-          <a:prstGeom prst="rect">
-            <a:avLst/>
-          </a:prstGeom>
-          <a:solidFill>
-            <a:srgbClr val="FFFFFF"/>
-          </a:solidFill>
-          <a:ln>
-            <a:noFill/>
-          </a:ln>
-          <a:effectLst/>
-        </p:spPr>
-        <p:style>
-          <a:lnRef idx="1">
-            <a:schemeClr val="accent1"/>
-          </a:lnRef>
-          <a:fillRef idx="3">
-            <a:schemeClr val="accent1"/>
-          </a:fillRef>
-          <a:effectRef idx="2">
-            <a:schemeClr val="accent1"/>
-          </a:effectRef>
-          <a:fontRef idx="minor">
-            <a:schemeClr val="lt1"/>
-          </a:fontRef>
-        </p:style>
-        <p:txBody>
-          <a:bodyPr rtlCol="0" anchor="ctr"/>
-          <a:lstStyle/>
-          <a:p>
-            <a:pPr algn="ctr"/>
-          </a:p>
-        </p:txBody>
-      </p:sp>
-      <p:sp>
-        <p:nvSpPr>
-          <p:cNvPr id="3" name="TextBox 2"/>
-          <p:cNvSpPr txBox="1"/>
-          <p:nvPr/>
-        </p:nvSpPr>
-        <p:spPr>
-          <a:xfrm>
-            <a:off x="658368" y="457200"/>
-            <a:ext cx="10874959" cy="274320"/>
-          </a:xfrm>
-          <a:prstGeom prst="rect">
-            <a:avLst/>
-          </a:prstGeom>
-          <a:noFill/>
-        </p:spPr>
-        <p:txBody>
-          <a:bodyPr wrap="square" anchor="t">
-            <a:spAutoFit/>
-          </a:bodyPr>
-          <a:lstStyle/>
-          <a:p>
-            <a:pPr algn="l">
-              <a:spcAft>
-                <a:spcPts val="0"/>
-              </a:spcAft>
-            </a:pPr>
-            <a:r>
-              <a:rPr sz="1100" b="1" i="0">
-                <a:solidFill>
-                  <a:srgbClr val="64748B"/>
-                </a:solidFill>
-                <a:latin typeface="Arial"/>
-              </a:rPr>
-              <a:t>DELAY ANALYSIS</a:t>
-            </a:r>
-          </a:p>
-        </p:txBody>
-      </p:sp>
-      <p:sp>
-        <p:nvSpPr>
-          <p:cNvPr id="4" name="TextBox 3"/>
-          <p:cNvSpPr txBox="1"/>
-          <p:nvPr/>
-        </p:nvSpPr>
-        <p:spPr>
-          <a:xfrm>
-            <a:off x="658368" y="768096"/>
-            <a:ext cx="10874959" cy="548640"/>
-          </a:xfrm>
-          <a:prstGeom prst="rect">
-            <a:avLst/>
-          </a:prstGeom>
-          <a:noFill/>
-        </p:spPr>
-        <p:txBody>
-          <a:bodyPr wrap="square" anchor="t">
-            <a:spAutoFit/>
-          </a:bodyPr>
-          <a:lstStyle/>
-          <a:p>
-            <a:pPr algn="l">
-              <a:spcAft>
-                <a:spcPts val="0"/>
-              </a:spcAft>
-            </a:pPr>
-            <a:r>
-              <a:rPr sz="3000" b="1" i="0">
-                <a:solidFill>
-                  <a:srgbClr val="0F172A"/>
-                </a:solidFill>
-                <a:latin typeface="Arial"/>
-              </a:rPr>
-              <a:t>Some trains are far riskier to connect from</a:t>
-            </a:r>
-          </a:p>
-        </p:txBody>
-      </p:sp>
-      <p:sp>
-        <p:nvSpPr>
-          <p:cNvPr id="5" name="Rectangle 4"/>
-          <p:cNvSpPr/>
-          <p:nvPr/>
-        </p:nvSpPr>
-        <p:spPr>
-          <a:xfrm>
-            <a:off x="658368" y="1371600"/>
-            <a:ext cx="1005840" cy="38100"/>
-          </a:xfrm>
-          <a:prstGeom prst="rect">
-            <a:avLst/>
-          </a:prstGeom>
-          <a:solidFill>
-            <a:srgbClr val="0EA5E9"/>
-          </a:solidFill>
-          <a:ln>
-            <a:noFill/>
-          </a:ln>
-          <a:effectLst/>
-        </p:spPr>
-        <p:style>
-          <a:lnRef idx="1">
-            <a:schemeClr val="accent1"/>
-          </a:lnRef>
-          <a:fillRef idx="3">
-            <a:schemeClr val="accent1"/>
-          </a:fillRef>
-          <a:effectRef idx="2">
-            <a:schemeClr val="accent1"/>
-          </a:effectRef>
-          <a:fontRef idx="minor">
-            <a:schemeClr val="lt1"/>
-          </a:fontRef>
-        </p:style>
-        <p:txBody>
-          <a:bodyPr rtlCol="0" anchor="ctr"/>
-          <a:lstStyle/>
-          <a:p>
-            <a:pPr algn="ctr"/>
-          </a:p>
-        </p:txBody>
-      </p:sp>
-      <p:pic>
-        <p:nvPicPr>
-          <p:cNvPr id="6" name="Picture 5" descr="09_train_boxplot.png"/>
-          <p:cNvPicPr>
-            <a:picLocks noChangeAspect="1"/>
-          </p:cNvPicPr>
-          <p:nvPr/>
-        </p:nvPicPr>
-        <p:blipFill>
-          <a:blip r:embed="rId2"/>
-          <a:stretch>
-            <a:fillRect/>
-          </a:stretch>
-        </p:blipFill>
-        <p:spPr>
-          <a:xfrm>
-            <a:off x="658368" y="1966900"/>
-            <a:ext cx="6949440" cy="3939183"/>
-          </a:xfrm>
-          <a:prstGeom prst="rect">
-            <a:avLst/>
-          </a:prstGeom>
-        </p:spPr>
-      </p:pic>
-      <p:sp>
-        <p:nvSpPr>
-          <p:cNvPr id="7" name="TextBox 6"/>
-          <p:cNvSpPr txBox="1"/>
-          <p:nvPr/>
-        </p:nvSpPr>
-        <p:spPr>
-          <a:xfrm>
-            <a:off x="7973568" y="1792224"/>
-            <a:ext cx="3559759" cy="4471416"/>
-          </a:xfrm>
-          <a:prstGeom prst="rect">
-            <a:avLst/>
-          </a:prstGeom>
-          <a:noFill/>
-        </p:spPr>
-        <p:txBody>
-          <a:bodyPr wrap="square" anchor="t">
-            <a:spAutoFit/>
-          </a:bodyPr>
-          <a:lstStyle/>
-          <a:p>
-            <a:pPr algn="l">
-              <a:spcAft>
-                <a:spcPts val="800"/>
-              </a:spcAft>
-            </a:pPr>
-            <a:r>
-              <a:rPr sz="1000" b="1" i="0">
-                <a:solidFill>
-                  <a:srgbClr val="0EA5E9"/>
-                </a:solidFill>
-                <a:latin typeface="Arial"/>
-              </a:rPr>
-              <a:t>WHY IT MATTERS</a:t>
-            </a:r>
-          </a:p>
-          <a:p>
-            <a:pPr>
-              <a:spcAft>
-                <a:spcPts val="1000"/>
-              </a:spcAft>
-            </a:pPr>
-            <a:r>
-              <a:rPr sz="1400" b="1" i="0">
-                <a:solidFill>
-                  <a:srgbClr val="0F172A"/>
-                </a:solidFill>
-                <a:latin typeface="Arial"/>
-              </a:rPr>
-              <a:t>Consistency matters more than the average.</a:t>
-            </a:r>
-          </a:p>
-          <a:p>
-            <a:pPr>
-              <a:spcAft>
-                <a:spcPts val="1000"/>
-              </a:spcAft>
-            </a:pPr>
-            <a:r>
-              <a:rPr sz="1400" b="0" i="0">
-                <a:solidFill>
-                  <a:srgbClr val="64748B"/>
-                </a:solidFill>
-                <a:latin typeface="Arial"/>
-              </a:rPr>
-              <a:t>A train that is reliably 20 minutes late is safe to plan around. One that swings between on-time and two hours late is not.</a:t>
-            </a:r>
-          </a:p>
-          <a:p>
-            <a:pPr>
-              <a:spcAft>
-                <a:spcPts val="1000"/>
-              </a:spcAft>
-            </a:pPr>
-            <a:r>
-              <a:rPr sz="1400" b="0" i="0">
-                <a:solidFill>
-                  <a:srgbClr val="64748B"/>
-                </a:solidFill>
-                <a:latin typeface="Arial"/>
-              </a:rPr>
-              <a:t>Spread, not the mean, is what should drive the warning.</a:t>
-            </a:r>
-          </a:p>
-        </p:txBody>
-      </p:sp>
-    </p:spTree>
-  </p:cSld>
-  <p:clrMapOvr>
-    <a:masterClrMapping/>
-  </p:clrMapOvr>
-</p:sld>
-</file>
-
-<file path=ppt/slides/slide14.xml><?xml version="1.0" encoding="utf-8"?>
-<p:sld xmlns:a="http://schemas.openxmlformats.org/drawingml/2006/main" xmlns:p="http://schemas.openxmlformats.org/presentationml/2006/main" xmlns:r="http://schemas.openxmlformats.org/officeDocument/2006/relationships">
-  <p:cSld>
-    <p:spTree>
-      <p:nvGrpSpPr>
-        <p:cNvPr id="1" name=""/>
-        <p:cNvGrpSpPr/>
-        <p:nvPr/>
-      </p:nvGrpSpPr>
-      <p:grpSpPr/>
-      <p:sp>
-        <p:nvSpPr>
-          <p:cNvPr id="2" name="Rectangle 1"/>
-          <p:cNvSpPr/>
-          <p:nvPr/>
-        </p:nvSpPr>
-        <p:spPr>
-          <a:xfrm>
-            <a:off x="0" y="0"/>
-            <a:ext cx="12191695" cy="6858000"/>
-          </a:xfrm>
-          <a:prstGeom prst="rect">
-            <a:avLst/>
-          </a:prstGeom>
-          <a:solidFill>
-            <a:srgbClr val="FFFFFF"/>
-          </a:solidFill>
-          <a:ln>
-            <a:noFill/>
-          </a:ln>
-          <a:effectLst/>
-        </p:spPr>
-        <p:style>
-          <a:lnRef idx="1">
-            <a:schemeClr val="accent1"/>
-          </a:lnRef>
-          <a:fillRef idx="3">
-            <a:schemeClr val="accent1"/>
-          </a:fillRef>
-          <a:effectRef idx="2">
-            <a:schemeClr val="accent1"/>
-          </a:effectRef>
-          <a:fontRef idx="minor">
-            <a:schemeClr val="lt1"/>
-          </a:fontRef>
-        </p:style>
-        <p:txBody>
-          <a:bodyPr rtlCol="0" anchor="ctr"/>
-          <a:lstStyle/>
-          <a:p>
-            <a:pPr algn="ctr"/>
-          </a:p>
-        </p:txBody>
-      </p:sp>
-      <p:sp>
-        <p:nvSpPr>
-          <p:cNvPr id="3" name="TextBox 2"/>
-          <p:cNvSpPr txBox="1"/>
-          <p:nvPr/>
-        </p:nvSpPr>
-        <p:spPr>
-          <a:xfrm>
-            <a:off x="658368" y="457200"/>
-            <a:ext cx="10874959" cy="274320"/>
-          </a:xfrm>
-          <a:prstGeom prst="rect">
-            <a:avLst/>
-          </a:prstGeom>
-          <a:noFill/>
-        </p:spPr>
-        <p:txBody>
-          <a:bodyPr wrap="square" anchor="t">
-            <a:spAutoFit/>
-          </a:bodyPr>
-          <a:lstStyle/>
-          <a:p>
-            <a:pPr algn="l">
-              <a:spcAft>
-                <a:spcPts val="0"/>
-              </a:spcAft>
-            </a:pPr>
-            <a:r>
-              <a:rPr sz="1100" b="1" i="0">
-                <a:solidFill>
-                  <a:srgbClr val="64748B"/>
-                </a:solidFill>
-                <a:latin typeface="Arial"/>
-              </a:rPr>
-              <a:t>DELAY ANALYSIS</a:t>
-            </a:r>
-          </a:p>
-        </p:txBody>
-      </p:sp>
-      <p:sp>
-        <p:nvSpPr>
-          <p:cNvPr id="4" name="TextBox 3"/>
-          <p:cNvSpPr txBox="1"/>
-          <p:nvPr/>
-        </p:nvSpPr>
-        <p:spPr>
-          <a:xfrm>
-            <a:off x="658368" y="768096"/>
-            <a:ext cx="10874959" cy="548640"/>
-          </a:xfrm>
-          <a:prstGeom prst="rect">
-            <a:avLst/>
-          </a:prstGeom>
-          <a:noFill/>
-        </p:spPr>
-        <p:txBody>
-          <a:bodyPr wrap="square" anchor="t">
-            <a:spAutoFit/>
-          </a:bodyPr>
-          <a:lstStyle/>
-          <a:p>
-            <a:pPr algn="l">
-              <a:spcAft>
-                <a:spcPts val="0"/>
-              </a:spcAft>
-            </a:pPr>
-            <a:r>
-              <a:rPr sz="3000" b="1" i="0">
-                <a:solidFill>
-                  <a:srgbClr val="0F172A"/>
-                </a:solidFill>
-                <a:latin typeface="Arial"/>
-              </a:rPr>
-              <a:t>The corridor matters more than the distance</a:t>
-            </a:r>
-          </a:p>
-        </p:txBody>
-      </p:sp>
-      <p:sp>
-        <p:nvSpPr>
-          <p:cNvPr id="5" name="Rectangle 4"/>
-          <p:cNvSpPr/>
-          <p:nvPr/>
-        </p:nvSpPr>
-        <p:spPr>
-          <a:xfrm>
-            <a:off x="658368" y="1371600"/>
-            <a:ext cx="1005840" cy="38100"/>
-          </a:xfrm>
-          <a:prstGeom prst="rect">
-            <a:avLst/>
-          </a:prstGeom>
-          <a:solidFill>
-            <a:srgbClr val="0EA5E9"/>
-          </a:solidFill>
-          <a:ln>
-            <a:noFill/>
-          </a:ln>
-          <a:effectLst/>
-        </p:spPr>
-        <p:style>
-          <a:lnRef idx="1">
-            <a:schemeClr val="accent1"/>
-          </a:lnRef>
-          <a:fillRef idx="3">
-            <a:schemeClr val="accent1"/>
-          </a:fillRef>
-          <a:effectRef idx="2">
-            <a:schemeClr val="accent1"/>
-          </a:effectRef>
-          <a:fontRef idx="minor">
-            <a:schemeClr val="lt1"/>
-          </a:fontRef>
-        </p:style>
-        <p:txBody>
-          <a:bodyPr rtlCol="0" anchor="ctr"/>
-          <a:lstStyle/>
-          <a:p>
-            <a:pPr algn="ctr"/>
-          </a:p>
-        </p:txBody>
-      </p:sp>
-      <p:pic>
-        <p:nvPicPr>
-          <p:cNvPr id="6" name="Picture 5" descr="10_routes_comparison.png"/>
-          <p:cNvPicPr>
-            <a:picLocks noChangeAspect="1"/>
-          </p:cNvPicPr>
-          <p:nvPr/>
-        </p:nvPicPr>
-        <p:blipFill>
-          <a:blip r:embed="rId2"/>
-          <a:stretch>
-            <a:fillRect/>
-          </a:stretch>
-        </p:blipFill>
-        <p:spPr>
-          <a:xfrm>
-            <a:off x="658368" y="1953567"/>
-            <a:ext cx="6949440" cy="3965849"/>
-          </a:xfrm>
-          <a:prstGeom prst="rect">
-            <a:avLst/>
-          </a:prstGeom>
-        </p:spPr>
-      </p:pic>
-      <p:sp>
-        <p:nvSpPr>
-          <p:cNvPr id="7" name="TextBox 6"/>
-          <p:cNvSpPr txBox="1"/>
-          <p:nvPr/>
-        </p:nvSpPr>
-        <p:spPr>
-          <a:xfrm>
-            <a:off x="7973568" y="1792224"/>
-            <a:ext cx="3559759" cy="4471416"/>
-          </a:xfrm>
-          <a:prstGeom prst="rect">
-            <a:avLst/>
-          </a:prstGeom>
-          <a:noFill/>
-        </p:spPr>
-        <p:txBody>
-          <a:bodyPr wrap="square" anchor="t">
-            <a:spAutoFit/>
-          </a:bodyPr>
-          <a:lstStyle/>
-          <a:p>
-            <a:pPr algn="l">
-              <a:spcAft>
-                <a:spcPts val="800"/>
-              </a:spcAft>
-            </a:pPr>
-            <a:r>
-              <a:rPr sz="1000" b="1" i="0">
-                <a:solidFill>
-                  <a:srgbClr val="0EA5E9"/>
-                </a:solidFill>
-                <a:latin typeface="Arial"/>
-              </a:rPr>
-              <a:t>WHY IT MATTERS</a:t>
-            </a:r>
-          </a:p>
-          <a:p>
-            <a:pPr>
-              <a:spcAft>
-                <a:spcPts val="1000"/>
-              </a:spcAft>
-            </a:pPr>
-            <a:r>
-              <a:rPr sz="1400" b="1" i="0">
-                <a:solidFill>
-                  <a:srgbClr val="0F172A"/>
-                </a:solidFill>
-                <a:latin typeface="Arial"/>
-              </a:rPr>
-              <a:t>Route identity is the strongest signal we found.</a:t>
-            </a:r>
-          </a:p>
-          <a:p>
-            <a:pPr>
-              <a:spcAft>
-                <a:spcPts val="1000"/>
-              </a:spcAft>
-            </a:pPr>
-            <a:r>
-              <a:rPr sz="1400" b="0" i="0">
-                <a:solidFill>
-                  <a:srgbClr val="64748B"/>
-                </a:solidFill>
-                <a:latin typeface="Arial"/>
-              </a:rPr>
-              <a:t>Dibrugarh–Kanyakumari covers 4,198 km at 20.4 min average, beating far shorter routes.</a:t>
-            </a:r>
-          </a:p>
-          <a:p>
-            <a:pPr>
-              <a:spcAft>
-                <a:spcPts val="1000"/>
-              </a:spcAft>
-            </a:pPr>
-            <a:r>
-              <a:rPr sz="1400" b="0" i="0">
-                <a:solidFill>
-                  <a:srgbClr val="64748B"/>
-                </a:solidFill>
-                <a:latin typeface="Arial"/>
-              </a:rPr>
-              <a:t>So risk has to be scored per route, not estimated from journey length.</a:t>
-            </a:r>
-          </a:p>
-        </p:txBody>
-      </p:sp>
-    </p:spTree>
-  </p:cSld>
-  <p:clrMapOvr>
-    <a:masterClrMapping/>
-  </p:clrMapOvr>
-</p:sld>
-</file>
-
-<file path=ppt/slides/slide15.xml><?xml version="1.0" encoding="utf-8"?>
-<p:sld xmlns:a="http://schemas.openxmlformats.org/drawingml/2006/main" xmlns:p="http://schemas.openxmlformats.org/presentationml/2006/main" xmlns:r="http://schemas.openxmlformats.org/officeDocument/2006/relationships">
-  <p:cSld>
-    <p:spTree>
-      <p:nvGrpSpPr>
-        <p:cNvPr id="1" name=""/>
-        <p:cNvGrpSpPr/>
-        <p:nvPr/>
-      </p:nvGrpSpPr>
-      <p:grpSpPr/>
-      <p:sp>
-        <p:nvSpPr>
-          <p:cNvPr id="2" name="Rectangle 1"/>
-          <p:cNvSpPr/>
-          <p:nvPr/>
-        </p:nvSpPr>
-        <p:spPr>
-          <a:xfrm>
-            <a:off x="0" y="0"/>
-            <a:ext cx="12191695" cy="6858000"/>
-          </a:xfrm>
-          <a:prstGeom prst="rect">
-            <a:avLst/>
-          </a:prstGeom>
-          <a:solidFill>
-            <a:srgbClr val="FFFFFF"/>
-          </a:solidFill>
-          <a:ln>
-            <a:noFill/>
-          </a:ln>
-          <a:effectLst/>
-        </p:spPr>
-        <p:style>
-          <a:lnRef idx="1">
-            <a:schemeClr val="accent1"/>
-          </a:lnRef>
-          <a:fillRef idx="3">
-            <a:schemeClr val="accent1"/>
-          </a:fillRef>
-          <a:effectRef idx="2">
-            <a:schemeClr val="accent1"/>
-          </a:effectRef>
-          <a:fontRef idx="minor">
-            <a:schemeClr val="lt1"/>
-          </a:fontRef>
-        </p:style>
-        <p:txBody>
-          <a:bodyPr rtlCol="0" anchor="ctr"/>
-          <a:lstStyle/>
-          <a:p>
-            <a:pPr algn="ctr"/>
-          </a:p>
-        </p:txBody>
-      </p:sp>
-      <p:sp>
-        <p:nvSpPr>
-          <p:cNvPr id="3" name="TextBox 2"/>
-          <p:cNvSpPr txBox="1"/>
-          <p:nvPr/>
-        </p:nvSpPr>
-        <p:spPr>
-          <a:xfrm>
-            <a:off x="658368" y="457200"/>
-            <a:ext cx="10874959" cy="274320"/>
-          </a:xfrm>
-          <a:prstGeom prst="rect">
-            <a:avLst/>
-          </a:prstGeom>
-          <a:noFill/>
-        </p:spPr>
-        <p:txBody>
-          <a:bodyPr wrap="square" anchor="t">
-            <a:spAutoFit/>
-          </a:bodyPr>
-          <a:lstStyle/>
-          <a:p>
-            <a:pPr algn="l">
-              <a:spcAft>
-                <a:spcPts val="0"/>
-              </a:spcAft>
-            </a:pPr>
-            <a:r>
-              <a:rPr sz="1100" b="1" i="0">
-                <a:solidFill>
-                  <a:srgbClr val="64748B"/>
-                </a:solidFill>
-                <a:latin typeface="Arial"/>
-              </a:rPr>
-              <a:t>ENGINEERING</a:t>
-            </a:r>
-          </a:p>
-        </p:txBody>
-      </p:sp>
-      <p:sp>
-        <p:nvSpPr>
-          <p:cNvPr id="4" name="TextBox 3"/>
-          <p:cNvSpPr txBox="1"/>
-          <p:nvPr/>
-        </p:nvSpPr>
-        <p:spPr>
-          <a:xfrm>
-            <a:off x="658368" y="768096"/>
-            <a:ext cx="10874959" cy="548640"/>
-          </a:xfrm>
-          <a:prstGeom prst="rect">
-            <a:avLst/>
-          </a:prstGeom>
-          <a:noFill/>
-        </p:spPr>
-        <p:txBody>
-          <a:bodyPr wrap="square" anchor="t">
-            <a:spAutoFit/>
-          </a:bodyPr>
-          <a:lstStyle/>
-          <a:p>
-            <a:pPr algn="l">
-              <a:spcAft>
-                <a:spcPts val="0"/>
-              </a:spcAft>
-            </a:pPr>
-            <a:r>
-              <a:rPr sz="3000" b="1" i="0">
-                <a:solidFill>
-                  <a:srgbClr val="0F172A"/>
-                </a:solidFill>
-                <a:latin typeface="Arial"/>
-              </a:rPr>
-              <a:t>Architecture</a:t>
-            </a:r>
-          </a:p>
-        </p:txBody>
-      </p:sp>
-      <p:sp>
-        <p:nvSpPr>
-          <p:cNvPr id="5" name="Rectangle 4"/>
-          <p:cNvSpPr/>
-          <p:nvPr/>
-        </p:nvSpPr>
-        <p:spPr>
-          <a:xfrm>
-            <a:off x="658368" y="1371600"/>
-            <a:ext cx="1005840" cy="38100"/>
-          </a:xfrm>
-          <a:prstGeom prst="rect">
-            <a:avLst/>
-          </a:prstGeom>
-          <a:solidFill>
-            <a:srgbClr val="0EA5E9"/>
-          </a:solidFill>
-          <a:ln>
-            <a:noFill/>
-          </a:ln>
-          <a:effectLst/>
-        </p:spPr>
-        <p:style>
-          <a:lnRef idx="1">
-            <a:schemeClr val="accent1"/>
-          </a:lnRef>
-          <a:fillRef idx="3">
-            <a:schemeClr val="accent1"/>
-          </a:fillRef>
-          <a:effectRef idx="2">
-            <a:schemeClr val="accent1"/>
-          </a:effectRef>
-          <a:fontRef idx="minor">
-            <a:schemeClr val="lt1"/>
-          </a:fontRef>
-        </p:style>
-        <p:txBody>
-          <a:bodyPr rtlCol="0" anchor="ctr"/>
-          <a:lstStyle/>
-          <a:p>
-            <a:pPr algn="ctr"/>
-          </a:p>
-        </p:txBody>
-      </p:sp>
-      <p:sp>
-        <p:nvSpPr>
-          <p:cNvPr id="6" name="TextBox 5"/>
-          <p:cNvSpPr txBox="1"/>
-          <p:nvPr/>
-        </p:nvSpPr>
-        <p:spPr>
-          <a:xfrm>
-            <a:off x="658368" y="1700784"/>
-            <a:ext cx="10874959" cy="4334256"/>
-          </a:xfrm>
-          <a:prstGeom prst="rect">
-            <a:avLst/>
-          </a:prstGeom>
-          <a:noFill/>
-        </p:spPr>
-        <p:txBody>
-          <a:bodyPr wrap="square" anchor="t">
-            <a:spAutoFit/>
-          </a:bodyPr>
-          <a:lstStyle/>
-          <a:p>
-            <a:pPr algn="l">
-              <a:spcAft>
-                <a:spcPts val="200"/>
-              </a:spcAft>
-            </a:pPr>
-            <a:r>
-              <a:rPr sz="1900" b="1" i="0">
-                <a:solidFill>
-                  <a:srgbClr val="0F172A"/>
-                </a:solidFill>
-                <a:latin typeface="Arial"/>
-              </a:rPr>
-              <a:t>Backend  ·  Python, FastAPI, scikit-learn</a:t>
-            </a:r>
-          </a:p>
-          <a:p>
-            <a:pPr>
-              <a:spcAft>
-                <a:spcPts val="1600"/>
-              </a:spcAft>
-            </a:pPr>
-            <a:r>
-              <a:rPr sz="1500" b="0" i="0">
-                <a:solidFill>
-                  <a:srgbClr val="64748B"/>
-                </a:solidFill>
-                <a:latin typeface="Arial"/>
-              </a:rPr>
-              <a:t>Six endpoints. /model publishes the model's own provenance and scores, so the numbers on these slides can be checked against the running service.</a:t>
-            </a:r>
-          </a:p>
-          <a:p>
-            <a:pPr>
-              <a:spcAft>
-                <a:spcPts val="200"/>
-              </a:spcAft>
-            </a:pPr>
-            <a:r>
-              <a:rPr sz="1900" b="1" i="0">
-                <a:solidFill>
-                  <a:srgbClr val="0F172A"/>
-                </a:solidFill>
-                <a:latin typeface="Arial"/>
-              </a:rPr>
-              <a:t>Frontend  ·  HTML, CSS, JavaScript</a:t>
-            </a:r>
-          </a:p>
-          <a:p>
-            <a:pPr>
-              <a:spcAft>
-                <a:spcPts val="1600"/>
-              </a:spcAft>
-            </a:pPr>
-            <a:r>
-              <a:rPr sz="1500" b="0" i="0">
-                <a:solidFill>
-                  <a:srgbClr val="64748B"/>
-                </a:solidFill>
-                <a:latin typeface="Arial"/>
-              </a:rPr>
-              <a:t>No build step. Detects local versus deployed and selects the right API automatically.</a:t>
-            </a:r>
-          </a:p>
-          <a:p>
-            <a:pPr>
-              <a:spcAft>
-                <a:spcPts val="200"/>
-              </a:spcAft>
-            </a:pPr>
-            <a:r>
-              <a:rPr sz="1900" b="1" i="0">
-                <a:solidFill>
-                  <a:srgbClr val="0F172A"/>
-                </a:solidFill>
-                <a:latin typeface="Arial"/>
-              </a:rPr>
-              <a:t>Mobile  ·  React Native via Expo</a:t>
-            </a:r>
-          </a:p>
-          <a:p>
-            <a:pPr>
-              <a:spcAft>
-                <a:spcPts val="1600"/>
-              </a:spcAft>
-            </a:pPr>
-            <a:r>
-              <a:rPr sz="1500" b="0" i="0">
-                <a:solidFill>
-                  <a:srgbClr val="64748B"/>
-                </a:solidFill>
-                <a:latin typeface="Arial"/>
-              </a:rPr>
-              <a:t>Same flow as the web app, pointed at the same deployed API.</a:t>
-            </a:r>
-          </a:p>
-          <a:p>
-            <a:pPr>
-              <a:spcAft>
-                <a:spcPts val="200"/>
-              </a:spcAft>
-            </a:pPr>
-            <a:r>
-              <a:rPr sz="1900" b="1" i="0">
-                <a:solidFill>
-                  <a:srgbClr val="0F172A"/>
-                </a:solidFill>
-                <a:latin typeface="Arial"/>
-              </a:rPr>
-              <a:t>Hosting  ·  Vercel and Render</a:t>
-            </a:r>
-          </a:p>
-          <a:p>
-            <a:pPr>
-              <a:spcAft>
-                <a:spcPts val="1600"/>
-              </a:spcAft>
-            </a:pPr>
-            <a:r>
-              <a:rPr sz="1500" b="0" i="0">
-                <a:solidFill>
-                  <a:srgbClr val="64748B"/>
-                </a:solidFill>
-                <a:latin typeface="Arial"/>
-              </a:rPr>
-              <a:t>Deployed straight from GitHub, with cold starts handled explicitly rather than leaving a frozen screen.</a:t>
-            </a:r>
-          </a:p>
-        </p:txBody>
-      </p:sp>
-    </p:spTree>
-  </p:cSld>
-  <p:clrMapOvr>
-    <a:masterClrMapping/>
-  </p:clrMapOvr>
-</p:sld>
-</file>
-
-<file path=ppt/slides/slide16.xml><?xml version="1.0" encoding="utf-8"?>
-<p:sld xmlns:a="http://schemas.openxmlformats.org/drawingml/2006/main" xmlns:p="http://schemas.openxmlformats.org/presentationml/2006/main" xmlns:r="http://schemas.openxmlformats.org/officeDocument/2006/relationships">
-  <p:cSld>
-    <p:spTree>
-      <p:nvGrpSpPr>
-        <p:cNvPr id="1" name=""/>
-        <p:cNvGrpSpPr/>
-        <p:nvPr/>
-      </p:nvGrpSpPr>
-      <p:grpSpPr/>
-      <p:sp>
-        <p:nvSpPr>
-          <p:cNvPr id="2" name="Rectangle 1"/>
-          <p:cNvSpPr/>
-          <p:nvPr/>
-        </p:nvSpPr>
-        <p:spPr>
-          <a:xfrm>
-            <a:off x="0" y="0"/>
-            <a:ext cx="12191695" cy="6858000"/>
-          </a:xfrm>
-          <a:prstGeom prst="rect">
-            <a:avLst/>
-          </a:prstGeom>
-          <a:solidFill>
             <a:srgbClr val="0F172A"/>
           </a:solidFill>
           <a:ln>
@@ -5754,7 +3724,7 @@
                 </a:solidFill>
                 <a:latin typeface="Arial"/>
               </a:rPr>
-              <a:t>Two questions nobody answers</a:t>
+              <a:t>A journey has more than one way to fail</a:t>
             </a:r>
           </a:p>
         </p:txBody>
@@ -5827,7 +3797,7 @@
           <a:p>
             <a:pPr algn="l">
               <a:spcAft>
-                <a:spcPts val="200"/>
+                <a:spcPts val="300"/>
               </a:spcAft>
             </a:pPr>
             <a:r>
@@ -5837,13 +3807,13 @@
                 </a:solidFill>
                 <a:latin typeface="Arial"/>
               </a:rPr>
-              <a:t>"Will my waitlisted ticket confirm?"</a:t>
+              <a:t>The ticket might not confirm</a:t>
             </a:r>
           </a:p>
           <a:p>
             <a:pPr>
               <a:spcAft>
-                <a:spcPts val="1600"/>
+                <a:spcPts val="1700"/>
               </a:spcAft>
             </a:pPr>
             <a:r>
@@ -5853,13 +3823,13 @@
                 </a:solidFill>
                 <a:latin typeface="Arial"/>
               </a:rPr>
-              <a:t>A ticket says WL 23. Nothing tells you whether it will clear, so passengers hold tickets they cannot use, or cancel ones that would have confirmed.</a:t>
+              <a:t>A ticket says WL 23 and nothing tells you whether it will clear. Passengers hold tickets they cannot use, or cancel ones that would have confirmed.</a:t>
             </a:r>
           </a:p>
           <a:p>
             <a:pPr>
               <a:spcAft>
-                <a:spcPts val="200"/>
+                <a:spcPts val="300"/>
               </a:spcAft>
             </a:pPr>
             <a:r>
@@ -5869,13 +3839,13 @@
                 </a:solidFill>
                 <a:latin typeface="Arial"/>
               </a:rPr>
-              <a:t>"Will I make my connection?"</a:t>
+              <a:t>The connection might not hold</a:t>
             </a:r>
           </a:p>
           <a:p>
             <a:pPr>
               <a:spcAft>
-                <a:spcPts val="1600"/>
+                <a:spcPts val="1700"/>
               </a:spcAft>
             </a:pPr>
             <a:r>
@@ -5885,13 +3855,13 @@
                 </a:solidFill>
                 <a:latin typeface="Arial"/>
               </a:rPr>
-              <a:t>Many city pairs have no direct train. You book two tickets and hope the first arrives in time. Indian trains are routinely late, so that hope is the whole plan.</a:t>
+              <a:t>Many city pairs have no direct train, so passengers book two legs and hope the first arrives in time. Delays are routine, so that hope is the entire plan.</a:t>
             </a:r>
           </a:p>
           <a:p>
             <a:pPr>
               <a:spcAft>
-                <a:spcPts val="200"/>
+                <a:spcPts val="300"/>
               </a:spcAft>
             </a:pPr>
             <a:r>
@@ -5901,13 +3871,13 @@
                 </a:solidFill>
                 <a:latin typeface="Arial"/>
               </a:rPr>
-              <a:t>Both are probability questions treated as guesswork</a:t>
+              <a:t>Nobody is watching the handover</a:t>
             </a:r>
           </a:p>
           <a:p>
             <a:pPr>
               <a:spcAft>
-                <a:spcPts val="1600"/>
+                <a:spcPts val="1700"/>
               </a:spcAft>
             </a:pPr>
             <a:r>
@@ -5917,7 +3887,7 @@
                 </a:solidFill>
                 <a:latin typeface="Arial"/>
               </a:rPr>
-              <a:t>The data to answer them exists — waitlist movement, quota, historical delays. It is simply never turned into a number for the passenger.</a:t>
+              <a:t>When a train runs late, no one knows how many people on board are due to board another train at the next junction. The connection is treated as the passenger's problem, even when a short hold would have saved it.</a:t>
             </a:r>
           </a:p>
         </p:txBody>
@@ -6018,7 +3988,7 @@
                 </a:solidFill>
                 <a:latin typeface="Arial"/>
               </a:rPr>
-              <a:t>SOLUTION</a:t>
+              <a:t>THE SOLUTION</a:t>
             </a:r>
           </a:p>
         </p:txBody>
@@ -6057,7 +4027,7 @@
                 </a:solidFill>
                 <a:latin typeface="Arial"/>
               </a:rPr>
-              <a:t>What the system does</a:t>
+              <a:t>One platform, four capabilities</a:t>
             </a:r>
           </a:p>
         </p:txBody>
@@ -6115,7 +4085,7 @@
         <p:spPr>
           <a:xfrm>
             <a:off x="658368" y="1700784"/>
-            <a:ext cx="10874959" cy="2651760"/>
+            <a:ext cx="10874959" cy="457200"/>
           </a:xfrm>
           <a:prstGeom prst="rect">
             <a:avLst/>
@@ -6130,97 +4100,17 @@
           <a:p>
             <a:pPr algn="l">
               <a:spcAft>
-                <a:spcPts val="200"/>
-              </a:spcAft>
-            </a:pPr>
-            <a:r>
-              <a:rPr sz="1900" b="1" i="0">
-                <a:solidFill>
-                  <a:srgbClr val="0F172A"/>
-                </a:solidFill>
-                <a:latin typeface="Arial"/>
-              </a:rPr>
-              <a:t>1.   Confirmation probability</a:t>
-            </a:r>
-          </a:p>
-          <a:p>
-            <a:pPr>
-              <a:spcAft>
-                <a:spcPts val="1600"/>
-              </a:spcAft>
-            </a:pPr>
-            <a:r>
-              <a:rPr sz="1500" b="0" i="0">
+                <a:spcPts val="0"/>
+              </a:spcAft>
+            </a:pPr>
+            <a:r>
+              <a:rPr sz="1600" b="0" i="0">
                 <a:solidFill>
                   <a:srgbClr val="64748B"/>
                 </a:solidFill>
                 <a:latin typeface="Arial"/>
               </a:rPr>
-              <a:t>Enter a PNR. Get the chance it confirms, and the factors driving that number.</a:t>
-            </a:r>
-          </a:p>
-          <a:p>
-            <a:pPr>
-              <a:spcAft>
-                <a:spcPts val="200"/>
-              </a:spcAft>
-            </a:pPr>
-            <a:r>
-              <a:rPr sz="1900" b="1" i="0">
-                <a:solidFill>
-                  <a:srgbClr val="0F172A"/>
-                </a:solidFill>
-                <a:latin typeface="Arial"/>
-              </a:rPr>
-              <a:t>2.   Direct and connecting routes</a:t>
-            </a:r>
-          </a:p>
-          <a:p>
-            <a:pPr>
-              <a:spcAft>
-                <a:spcPts val="1600"/>
-              </a:spcAft>
-            </a:pPr>
-            <a:r>
-              <a:rPr sz="1500" b="0" i="0">
-                <a:solidFill>
-                  <a:srgbClr val="64748B"/>
-                </a:solidFill>
-                <a:latin typeface="Arial"/>
-              </a:rPr>
-              <a:t>Search city to city. See direct trains, and multi-leg options where no direct train exists or the direct one is full.</a:t>
-            </a:r>
-          </a:p>
-          <a:p>
-            <a:pPr>
-              <a:spcAft>
-                <a:spcPts val="200"/>
-              </a:spcAft>
-            </a:pPr>
-            <a:r>
-              <a:rPr sz="1900" b="1" i="0">
-                <a:solidFill>
-                  <a:srgbClr val="0F172A"/>
-                </a:solidFill>
-                <a:latin typeface="Arial"/>
-              </a:rPr>
-              <a:t>3.   Missed-connection risk</a:t>
-            </a:r>
-          </a:p>
-          <a:p>
-            <a:pPr>
-              <a:spcAft>
-                <a:spcPts val="0"/>
-              </a:spcAft>
-            </a:pPr>
-            <a:r>
-              <a:rPr sz="1500" b="0" i="0">
-                <a:solidFill>
-                  <a:srgbClr val="64748B"/>
-                </a:solidFill>
-                <a:latin typeface="Arial"/>
-              </a:rPr>
-              <a:t>For each connecting option, the chance the first train's delay causes you to miss the second.</a:t>
+              <a:t>Built around a single question: will this journey actually work, end to end?</a:t>
             </a:r>
           </a:p>
         </p:txBody>
@@ -6233,12 +4123,12 @@
         </p:nvSpPr>
         <p:spPr>
           <a:xfrm>
-            <a:off x="658368" y="4489704"/>
-            <a:ext cx="2540431" cy="1371600"/>
+            <a:off x="658368" y="2359152"/>
+            <a:ext cx="5300319" cy="1600200"/>
           </a:xfrm>
           <a:prstGeom prst="roundRect">
             <a:avLst>
-              <a:gd name="adj" fmla="val 6000"/>
+              <a:gd name="adj" fmla="val 5000"/>
             </a:avLst>
           </a:prstGeom>
           <a:solidFill>
@@ -6279,8 +4169,8 @@
         </p:nvSpPr>
         <p:spPr>
           <a:xfrm>
-            <a:off x="658368" y="4709160"/>
-            <a:ext cx="2540431" cy="640080"/>
+            <a:off x="969264" y="2560320"/>
+            <a:ext cx="914400" cy="365760"/>
           </a:xfrm>
           <a:prstGeom prst="rect">
             <a:avLst/>
@@ -6293,19 +4183,19 @@
           </a:bodyPr>
           <a:lstStyle/>
           <a:p>
-            <a:pPr algn="ctr">
+            <a:pPr algn="l">
               <a:spcAft>
                 <a:spcPts val="0"/>
               </a:spcAft>
             </a:pPr>
             <a:r>
-              <a:rPr sz="3000" b="1" i="0">
-                <a:solidFill>
-                  <a:srgbClr val="0F172A"/>
-                </a:solidFill>
-                <a:latin typeface="Arial"/>
-              </a:rPr>
-              <a:t>28,748</a:t>
+              <a:rPr sz="1300" b="1" i="0">
+                <a:solidFill>
+                  <a:srgbClr val="0EA5E9"/>
+                </a:solidFill>
+                <a:latin typeface="Arial"/>
+              </a:rPr>
+              <a:t>01</a:t>
             </a:r>
           </a:p>
         </p:txBody>
@@ -6318,8 +4208,8 @@
         </p:nvSpPr>
         <p:spPr>
           <a:xfrm>
-            <a:off x="749808" y="5358384"/>
-            <a:ext cx="2357551" cy="457200"/>
+            <a:off x="969264" y="2907792"/>
+            <a:ext cx="4678527" cy="914400"/>
           </a:xfrm>
           <a:prstGeom prst="rect">
             <a:avLst/>
@@ -6332,19 +4222,35 @@
           </a:bodyPr>
           <a:lstStyle/>
           <a:p>
-            <a:pPr algn="ctr">
+            <a:pPr algn="l">
+              <a:spcAft>
+                <a:spcPts val="400"/>
+              </a:spcAft>
+            </a:pPr>
+            <a:r>
+              <a:rPr sz="1900" b="1" i="0">
+                <a:solidFill>
+                  <a:srgbClr val="0F172A"/>
+                </a:solidFill>
+                <a:latin typeface="Arial"/>
+              </a:rPr>
+              <a:t>Confirmation prediction</a:t>
+            </a:r>
+          </a:p>
+          <a:p>
+            <a:pPr>
               <a:spcAft>
                 <a:spcPts val="0"/>
               </a:spcAft>
             </a:pPr>
             <a:r>
-              <a:rPr sz="1100" b="0" i="0">
+              <a:rPr sz="1300" b="0" i="0">
                 <a:solidFill>
                   <a:srgbClr val="64748B"/>
                 </a:solidFill>
                 <a:latin typeface="Arial"/>
               </a:rPr>
-              <a:t>REAL TICKETS TRAINED ON</a:t>
+              <a:t>Enter a PNR and get the probability it confirms, with the factors behind it.</a:t>
             </a:r>
           </a:p>
         </p:txBody>
@@ -6357,12 +4263,12 @@
         </p:nvSpPr>
         <p:spPr>
           <a:xfrm>
-            <a:off x="3436543" y="4489704"/>
-            <a:ext cx="2540431" cy="1371600"/>
+            <a:off x="6233007" y="2359152"/>
+            <a:ext cx="5300319" cy="1600200"/>
           </a:xfrm>
           <a:prstGeom prst="roundRect">
             <a:avLst>
-              <a:gd name="adj" fmla="val 6000"/>
+              <a:gd name="adj" fmla="val 5000"/>
             </a:avLst>
           </a:prstGeom>
           <a:solidFill>
@@ -6403,8 +4309,8 @@
         </p:nvSpPr>
         <p:spPr>
           <a:xfrm>
-            <a:off x="3436543" y="4709160"/>
-            <a:ext cx="2540431" cy="640080"/>
+            <a:off x="6543903" y="2560320"/>
+            <a:ext cx="914400" cy="365760"/>
           </a:xfrm>
           <a:prstGeom prst="rect">
             <a:avLst/>
@@ -6417,19 +4323,19 @@
           </a:bodyPr>
           <a:lstStyle/>
           <a:p>
-            <a:pPr algn="ctr">
+            <a:pPr algn="l">
               <a:spcAft>
                 <a:spcPts val="0"/>
               </a:spcAft>
             </a:pPr>
             <a:r>
-              <a:rPr sz="3000" b="1" i="0">
+              <a:rPr sz="1300" b="1" i="0">
                 <a:solidFill>
                   <a:srgbClr val="0EA5E9"/>
                 </a:solidFill>
                 <a:latin typeface="Arial"/>
               </a:rPr>
-              <a:t>0.796</a:t>
+              <a:t>02</a:t>
             </a:r>
           </a:p>
         </p:txBody>
@@ -6442,8 +4348,8 @@
         </p:nvSpPr>
         <p:spPr>
           <a:xfrm>
-            <a:off x="3527983" y="5358384"/>
-            <a:ext cx="2357551" cy="457200"/>
+            <a:off x="6543903" y="2907792"/>
+            <a:ext cx="4678527" cy="914400"/>
           </a:xfrm>
           <a:prstGeom prst="rect">
             <a:avLst/>
@@ -6456,19 +4362,35 @@
           </a:bodyPr>
           <a:lstStyle/>
           <a:p>
-            <a:pPr algn="ctr">
+            <a:pPr algn="l">
+              <a:spcAft>
+                <a:spcPts val="400"/>
+              </a:spcAft>
+            </a:pPr>
+            <a:r>
+              <a:rPr sz="1900" b="1" i="0">
+                <a:solidFill>
+                  <a:srgbClr val="0F172A"/>
+                </a:solidFill>
+                <a:latin typeface="Arial"/>
+              </a:rPr>
+              <a:t>Connecting route search</a:t>
+            </a:r>
+          </a:p>
+          <a:p>
+            <a:pPr>
               <a:spcAft>
                 <a:spcPts val="0"/>
               </a:spcAft>
             </a:pPr>
             <a:r>
-              <a:rPr sz="1100" b="0" i="0">
+              <a:rPr sz="1300" b="0" i="0">
                 <a:solidFill>
                   <a:srgbClr val="64748B"/>
                 </a:solidFill>
                 <a:latin typeface="Arial"/>
               </a:rPr>
-              <a:t>MODEL AUC</a:t>
+              <a:t>Find direct trains, and multi-leg routes where none exists or the direct train is full.</a:t>
             </a:r>
           </a:p>
         </p:txBody>
@@ -6481,12 +4403,12 @@
         </p:nvSpPr>
         <p:spPr>
           <a:xfrm>
-            <a:off x="6214718" y="4489704"/>
-            <a:ext cx="2540431" cy="1371600"/>
+            <a:off x="658368" y="4197096"/>
+            <a:ext cx="5300319" cy="1600200"/>
           </a:xfrm>
           <a:prstGeom prst="roundRect">
             <a:avLst>
-              <a:gd name="adj" fmla="val 6000"/>
+              <a:gd name="adj" fmla="val 5000"/>
             </a:avLst>
           </a:prstGeom>
           <a:solidFill>
@@ -6527,8 +4449,8 @@
         </p:nvSpPr>
         <p:spPr>
           <a:xfrm>
-            <a:off x="6214718" y="4709160"/>
-            <a:ext cx="2540431" cy="640080"/>
+            <a:off x="969264" y="4398264"/>
+            <a:ext cx="914400" cy="365760"/>
           </a:xfrm>
           <a:prstGeom prst="rect">
             <a:avLst/>
@@ -6541,19 +4463,19 @@
           </a:bodyPr>
           <a:lstStyle/>
           <a:p>
-            <a:pPr algn="ctr">
+            <a:pPr algn="l">
               <a:spcAft>
                 <a:spcPts val="0"/>
               </a:spcAft>
             </a:pPr>
             <a:r>
-              <a:rPr sz="3000" b="1" i="0">
-                <a:solidFill>
-                  <a:srgbClr val="0F172A"/>
-                </a:solidFill>
-                <a:latin typeface="Arial"/>
-              </a:rPr>
-              <a:t>66%</a:t>
+              <a:rPr sz="1300" b="1" i="0">
+                <a:solidFill>
+                  <a:srgbClr val="0EA5E9"/>
+                </a:solidFill>
+                <a:latin typeface="Arial"/>
+              </a:rPr>
+              <a:t>03</a:t>
             </a:r>
           </a:p>
         </p:txBody>
@@ -6566,8 +4488,8 @@
         </p:nvSpPr>
         <p:spPr>
           <a:xfrm>
-            <a:off x="6306158" y="5358384"/>
-            <a:ext cx="2357551" cy="457200"/>
+            <a:off x="969264" y="4745736"/>
+            <a:ext cx="4678527" cy="914400"/>
           </a:xfrm>
           <a:prstGeom prst="rect">
             <a:avLst/>
@@ -6580,19 +4502,35 @@
           </a:bodyPr>
           <a:lstStyle/>
           <a:p>
-            <a:pPr algn="ctr">
+            <a:pPr algn="l">
+              <a:spcAft>
+                <a:spcPts val="400"/>
+              </a:spcAft>
+            </a:pPr>
+            <a:r>
+              <a:rPr sz="1900" b="1" i="0">
+                <a:solidFill>
+                  <a:srgbClr val="0F172A"/>
+                </a:solidFill>
+                <a:latin typeface="Arial"/>
+              </a:rPr>
+              <a:t>Missed-connection risk</a:t>
+            </a:r>
+          </a:p>
+          <a:p>
+            <a:pPr>
               <a:spcAft>
                 <a:spcPts val="0"/>
               </a:spcAft>
             </a:pPr>
             <a:r>
-              <a:rPr sz="1100" b="0" i="0">
+              <a:rPr sz="1300" b="0" i="0">
                 <a:solidFill>
                   <a:srgbClr val="64748B"/>
                 </a:solidFill>
                 <a:latin typeface="Arial"/>
               </a:rPr>
-              <a:t>OF ACHIEVABLE SIGNAL</a:t>
+              <a:t>Score the chance the first train's delay costs you the second one.</a:t>
             </a:r>
           </a:p>
         </p:txBody>
@@ -6605,12 +4543,12 @@
         </p:nvSpPr>
         <p:spPr>
           <a:xfrm>
-            <a:off x="8992893" y="4489704"/>
-            <a:ext cx="2540431" cy="1371600"/>
+            <a:off x="6233007" y="4197096"/>
+            <a:ext cx="5300319" cy="1600200"/>
           </a:xfrm>
           <a:prstGeom prst="roundRect">
             <a:avLst>
-              <a:gd name="adj" fmla="val 6000"/>
+              <a:gd name="adj" fmla="val 5000"/>
             </a:avLst>
           </a:prstGeom>
           <a:solidFill>
@@ -6651,8 +4589,8 @@
         </p:nvSpPr>
         <p:spPr>
           <a:xfrm>
-            <a:off x="8992893" y="4709160"/>
-            <a:ext cx="2540431" cy="640080"/>
+            <a:off x="6543903" y="4398264"/>
+            <a:ext cx="914400" cy="365760"/>
           </a:xfrm>
           <a:prstGeom prst="rect">
             <a:avLst/>
@@ -6665,19 +4603,19 @@
           </a:bodyPr>
           <a:lstStyle/>
           <a:p>
-            <a:pPr algn="ctr">
+            <a:pPr algn="l">
               <a:spcAft>
                 <a:spcPts val="0"/>
               </a:spcAft>
             </a:pPr>
             <a:r>
-              <a:rPr sz="3000" b="1" i="0">
+              <a:rPr sz="1300" b="1" i="0">
                 <a:solidFill>
                   <a:srgbClr val="059669"/>
                 </a:solidFill>
                 <a:latin typeface="Arial"/>
               </a:rPr>
-              <a:t>Live</a:t>
+              <a:t>04</a:t>
             </a:r>
           </a:p>
         </p:txBody>
@@ -6690,8 +4628,8 @@
         </p:nvSpPr>
         <p:spPr>
           <a:xfrm>
-            <a:off x="9084333" y="5358384"/>
-            <a:ext cx="2357551" cy="457200"/>
+            <a:off x="6543903" y="4745736"/>
+            <a:ext cx="4678527" cy="914400"/>
           </a:xfrm>
           <a:prstGeom prst="rect">
             <a:avLst/>
@@ -6704,19 +4642,74 @@
           </a:bodyPr>
           <a:lstStyle/>
           <a:p>
-            <a:pPr algn="ctr">
+            <a:pPr algn="l">
+              <a:spcAft>
+                <a:spcPts val="400"/>
+              </a:spcAft>
+            </a:pPr>
+            <a:r>
+              <a:rPr sz="1900" b="1" i="0">
+                <a:solidFill>
+                  <a:srgbClr val="0F172A"/>
+                </a:solidFill>
+                <a:latin typeface="Arial"/>
+              </a:rPr>
+              <a:t>Operations dashboard</a:t>
+            </a:r>
+          </a:p>
+          <a:p>
+            <a:pPr>
               <a:spcAft>
                 <a:spcPts val="0"/>
               </a:spcAft>
             </a:pPr>
             <a:r>
-              <a:rPr sz="1100" b="0" i="0">
+              <a:rPr sz="1300" b="0" i="0">
                 <a:solidFill>
                   <a:srgbClr val="64748B"/>
                 </a:solidFill>
                 <a:latin typeface="Arial"/>
               </a:rPr>
-              <a:t>WEB + API DEPLOYED</a:t>
+              <a:t>Show staff how many passengers are transferring between two trains at a junction.</a:t>
+            </a:r>
+          </a:p>
+        </p:txBody>
+      </p:sp>
+      <p:sp>
+        <p:nvSpPr>
+          <p:cNvPr id="19" name="TextBox 18"/>
+          <p:cNvSpPr txBox="1"/>
+          <p:nvPr/>
+        </p:nvSpPr>
+        <p:spPr>
+          <a:xfrm>
+            <a:off x="658368" y="6126480"/>
+            <a:ext cx="10874959" cy="365760"/>
+          </a:xfrm>
+          <a:prstGeom prst="rect">
+            <a:avLst/>
+          </a:prstGeom>
+          <a:noFill/>
+        </p:spPr>
+        <p:txBody>
+          <a:bodyPr wrap="square" anchor="t">
+            <a:spAutoFit/>
+          </a:bodyPr>
+          <a:lstStyle/>
+          <a:p>
+            <a:pPr algn="l">
+              <a:spcAft>
+                <a:spcPts val="0"/>
+              </a:spcAft>
+            </a:pPr>
+            <a:r>
+              <a:rPr sz="1200" b="0" i="1">
+                <a:solidFill>
+                  <a:srgbClr val="64748B"/>
+                </a:solidFill>
+                <a:latin typeface="Arial"/>
+              </a:rPr>
+              <a:t>The first three serve passengers. The fourth serves the railway — and it is only possible because the first three already exist.</a:t>
             </a:r>
           </a:p>
         </p:txBody>
@@ -6817,7 +4810,7 @@
                 </a:solidFill>
                 <a:latin typeface="Arial"/>
               </a:rPr>
-              <a:t>PIPELINE</a:t>
+              <a:t>CAPABILITIES 02 AND 03</a:t>
             </a:r>
           </a:p>
         </p:txBody>
@@ -6856,7 +4849,7 @@
                 </a:solidFill>
                 <a:latin typeface="Arial"/>
               </a:rPr>
-              <a:t>How it works</a:t>
+              <a:t>Where a connecting journey breaks</a:t>
             </a:r>
           </a:p>
         </p:txBody>
@@ -6907,14 +4900,104 @@
       </p:sp>
       <p:sp>
         <p:nvSpPr>
-          <p:cNvPr id="6" name="TextBox 5"/>
+          <p:cNvPr id="6" name="Rounded Rectangle 5"/>
+          <p:cNvSpPr/>
+          <p:nvPr/>
+        </p:nvSpPr>
+        <p:spPr>
+          <a:xfrm>
+            <a:off x="658368" y="2157984"/>
+            <a:ext cx="2468880" cy="1051560"/>
+          </a:xfrm>
+          <a:prstGeom prst="roundRect">
+            <a:avLst>
+              <a:gd name="adj" fmla="val 5000"/>
+            </a:avLst>
+          </a:prstGeom>
+          <a:solidFill>
+            <a:srgbClr val="F1F5F9"/>
+          </a:solidFill>
+          <a:ln>
+            <a:noFill/>
+          </a:ln>
+          <a:effectLst/>
+        </p:spPr>
+        <p:style>
+          <a:lnRef idx="1">
+            <a:schemeClr val="accent1"/>
+          </a:lnRef>
+          <a:fillRef idx="3">
+            <a:schemeClr val="accent1"/>
+          </a:fillRef>
+          <a:effectRef idx="2">
+            <a:schemeClr val="accent1"/>
+          </a:effectRef>
+          <a:fontRef idx="minor">
+            <a:schemeClr val="lt1"/>
+          </a:fontRef>
+        </p:style>
+        <p:txBody>
+          <a:bodyPr rtlCol="0" anchor="ctr"/>
+          <a:lstStyle/>
+          <a:p>
+            <a:pPr algn="ctr"/>
+          </a:p>
+        </p:txBody>
+      </p:sp>
+      <p:sp>
+        <p:nvSpPr>
+          <p:cNvPr id="7" name="Rectangle 6"/>
+          <p:cNvSpPr/>
+          <p:nvPr/>
+        </p:nvSpPr>
+        <p:spPr>
+          <a:xfrm>
+            <a:off x="658368" y="2157984"/>
+            <a:ext cx="50800" cy="1051560"/>
+          </a:xfrm>
+          <a:prstGeom prst="rect">
+            <a:avLst/>
+          </a:prstGeom>
+          <a:solidFill>
+            <a:srgbClr val="0EA5E9"/>
+          </a:solidFill>
+          <a:ln>
+            <a:noFill/>
+          </a:ln>
+          <a:effectLst/>
+        </p:spPr>
+        <p:style>
+          <a:lnRef idx="1">
+            <a:schemeClr val="accent1"/>
+          </a:lnRef>
+          <a:fillRef idx="3">
+            <a:schemeClr val="accent1"/>
+          </a:fillRef>
+          <a:effectRef idx="2">
+            <a:schemeClr val="accent1"/>
+          </a:effectRef>
+          <a:fontRef idx="minor">
+            <a:schemeClr val="lt1"/>
+          </a:fontRef>
+        </p:style>
+        <p:txBody>
+          <a:bodyPr rtlCol="0" anchor="ctr"/>
+          <a:lstStyle/>
+          <a:p>
+            <a:pPr algn="ctr"/>
+          </a:p>
+        </p:txBody>
+      </p:sp>
+      <p:sp>
+        <p:nvSpPr>
+          <p:cNvPr id="8" name="TextBox 7"/>
           <p:cNvSpPr txBox="1"/>
           <p:nvPr/>
         </p:nvSpPr>
         <p:spPr>
           <a:xfrm>
-            <a:off x="658368" y="1700784"/>
-            <a:ext cx="10874959" cy="4334256"/>
+            <a:off x="914400" y="2359152"/>
+            <a:ext cx="2103120" cy="731520"/>
           </a:xfrm>
           <a:prstGeom prst="rect">
             <a:avLst/>
@@ -6933,125 +5016,611 @@
               </a:spcAft>
             </a:pPr>
             <a:r>
-              <a:rPr sz="1900" b="1" i="0">
+              <a:rPr sz="1800" b="1" i="0">
                 <a:solidFill>
                   <a:srgbClr val="0F172A"/>
                 </a:solidFill>
                 <a:latin typeface="Arial"/>
               </a:rPr>
-              <a:t>Look up the PNR</a:t>
+              <a:t>Train A</a:t>
             </a:r>
           </a:p>
           <a:p>
             <a:pPr>
               <a:spcAft>
-                <a:spcPts val="1600"/>
-              </a:spcAft>
-            </a:pPr>
-            <a:r>
-              <a:rPr sz="1500" b="0" i="0">
+                <a:spcPts val="0"/>
+              </a:spcAft>
+            </a:pPr>
+            <a:r>
+              <a:rPr sz="1200" b="0" i="0">
                 <a:solidFill>
                   <a:srgbClr val="64748B"/>
                 </a:solidFill>
                 <a:latin typeface="Arial"/>
               </a:rPr>
-              <a:t>A third-party IRCTC API returns train, class, quota, booking status and current status.</a:t>
+              <a:t>Leg one</a:t>
+            </a:r>
+          </a:p>
+        </p:txBody>
+      </p:sp>
+      <p:sp>
+        <p:nvSpPr>
+          <p:cNvPr id="9" name="Rounded Rectangle 8"/>
+          <p:cNvSpPr/>
+          <p:nvPr/>
+        </p:nvSpPr>
+        <p:spPr>
+          <a:xfrm>
+            <a:off x="4315968" y="2157984"/>
+            <a:ext cx="2468880" cy="1051560"/>
+          </a:xfrm>
+          <a:prstGeom prst="roundRect">
+            <a:avLst>
+              <a:gd name="adj" fmla="val 5000"/>
+            </a:avLst>
+          </a:prstGeom>
+          <a:solidFill>
+            <a:srgbClr val="F1F5F9"/>
+          </a:solidFill>
+          <a:ln>
+            <a:noFill/>
+          </a:ln>
+          <a:effectLst/>
+        </p:spPr>
+        <p:style>
+          <a:lnRef idx="1">
+            <a:schemeClr val="accent1"/>
+          </a:lnRef>
+          <a:fillRef idx="3">
+            <a:schemeClr val="accent1"/>
+          </a:fillRef>
+          <a:effectRef idx="2">
+            <a:schemeClr val="accent1"/>
+          </a:effectRef>
+          <a:fontRef idx="minor">
+            <a:schemeClr val="lt1"/>
+          </a:fontRef>
+        </p:style>
+        <p:txBody>
+          <a:bodyPr rtlCol="0" anchor="ctr"/>
+          <a:lstStyle/>
+          <a:p>
+            <a:pPr algn="ctr"/>
+          </a:p>
+        </p:txBody>
+      </p:sp>
+      <p:sp>
+        <p:nvSpPr>
+          <p:cNvPr id="10" name="Rectangle 9"/>
+          <p:cNvSpPr/>
+          <p:nvPr/>
+        </p:nvSpPr>
+        <p:spPr>
+          <a:xfrm>
+            <a:off x="4315968" y="2157984"/>
+            <a:ext cx="50800" cy="1051560"/>
+          </a:xfrm>
+          <a:prstGeom prst="rect">
+            <a:avLst/>
+          </a:prstGeom>
+          <a:solidFill>
+            <a:srgbClr val="D97706"/>
+          </a:solidFill>
+          <a:ln>
+            <a:noFill/>
+          </a:ln>
+          <a:effectLst/>
+        </p:spPr>
+        <p:style>
+          <a:lnRef idx="1">
+            <a:schemeClr val="accent1"/>
+          </a:lnRef>
+          <a:fillRef idx="3">
+            <a:schemeClr val="accent1"/>
+          </a:fillRef>
+          <a:effectRef idx="2">
+            <a:schemeClr val="accent1"/>
+          </a:effectRef>
+          <a:fontRef idx="minor">
+            <a:schemeClr val="lt1"/>
+          </a:fontRef>
+        </p:style>
+        <p:txBody>
+          <a:bodyPr rtlCol="0" anchor="ctr"/>
+          <a:lstStyle/>
+          <a:p>
+            <a:pPr algn="ctr"/>
+          </a:p>
+        </p:txBody>
+      </p:sp>
+      <p:sp>
+        <p:nvSpPr>
+          <p:cNvPr id="11" name="TextBox 10"/>
+          <p:cNvSpPr txBox="1"/>
+          <p:nvPr/>
+        </p:nvSpPr>
+        <p:spPr>
+          <a:xfrm>
+            <a:off x="4572000" y="2359152"/>
+            <a:ext cx="2103120" cy="731520"/>
+          </a:xfrm>
+          <a:prstGeom prst="rect">
+            <a:avLst/>
+          </a:prstGeom>
+          <a:noFill/>
+        </p:spPr>
+        <p:txBody>
+          <a:bodyPr wrap="square" anchor="t">
+            <a:spAutoFit/>
+          </a:bodyPr>
+          <a:lstStyle/>
+          <a:p>
+            <a:pPr algn="l">
+              <a:spcAft>
+                <a:spcPts val="200"/>
+              </a:spcAft>
+            </a:pPr>
+            <a:r>
+              <a:rPr sz="1800" b="1" i="0">
+                <a:solidFill>
+                  <a:srgbClr val="0F172A"/>
+                </a:solidFill>
+                <a:latin typeface="Arial"/>
+              </a:rPr>
+              <a:t>Junction</a:t>
             </a:r>
           </a:p>
           <a:p>
             <a:pPr>
               <a:spcAft>
+                <a:spcPts val="0"/>
+              </a:spcAft>
+            </a:pPr>
+            <a:r>
+              <a:rPr sz="1200" b="0" i="0">
+                <a:solidFill>
+                  <a:srgbClr val="64748B"/>
+                </a:solidFill>
+                <a:latin typeface="Arial"/>
+              </a:rPr>
+              <a:t>Layover window</a:t>
+            </a:r>
+          </a:p>
+        </p:txBody>
+      </p:sp>
+      <p:sp>
+        <p:nvSpPr>
+          <p:cNvPr id="12" name="Rounded Rectangle 11"/>
+          <p:cNvSpPr/>
+          <p:nvPr/>
+        </p:nvSpPr>
+        <p:spPr>
+          <a:xfrm>
+            <a:off x="7973568" y="2157984"/>
+            <a:ext cx="2468880" cy="1051560"/>
+          </a:xfrm>
+          <a:prstGeom prst="roundRect">
+            <a:avLst>
+              <a:gd name="adj" fmla="val 5000"/>
+            </a:avLst>
+          </a:prstGeom>
+          <a:solidFill>
+            <a:srgbClr val="F1F5F9"/>
+          </a:solidFill>
+          <a:ln>
+            <a:noFill/>
+          </a:ln>
+          <a:effectLst/>
+        </p:spPr>
+        <p:style>
+          <a:lnRef idx="1">
+            <a:schemeClr val="accent1"/>
+          </a:lnRef>
+          <a:fillRef idx="3">
+            <a:schemeClr val="accent1"/>
+          </a:fillRef>
+          <a:effectRef idx="2">
+            <a:schemeClr val="accent1"/>
+          </a:effectRef>
+          <a:fontRef idx="minor">
+            <a:schemeClr val="lt1"/>
+          </a:fontRef>
+        </p:style>
+        <p:txBody>
+          <a:bodyPr rtlCol="0" anchor="ctr"/>
+          <a:lstStyle/>
+          <a:p>
+            <a:pPr algn="ctr"/>
+          </a:p>
+        </p:txBody>
+      </p:sp>
+      <p:sp>
+        <p:nvSpPr>
+          <p:cNvPr id="13" name="Rectangle 12"/>
+          <p:cNvSpPr/>
+          <p:nvPr/>
+        </p:nvSpPr>
+        <p:spPr>
+          <a:xfrm>
+            <a:off x="7973568" y="2157984"/>
+            <a:ext cx="50800" cy="1051560"/>
+          </a:xfrm>
+          <a:prstGeom prst="rect">
+            <a:avLst/>
+          </a:prstGeom>
+          <a:solidFill>
+            <a:srgbClr val="0EA5E9"/>
+          </a:solidFill>
+          <a:ln>
+            <a:noFill/>
+          </a:ln>
+          <a:effectLst/>
+        </p:spPr>
+        <p:style>
+          <a:lnRef idx="1">
+            <a:schemeClr val="accent1"/>
+          </a:lnRef>
+          <a:fillRef idx="3">
+            <a:schemeClr val="accent1"/>
+          </a:fillRef>
+          <a:effectRef idx="2">
+            <a:schemeClr val="accent1"/>
+          </a:effectRef>
+          <a:fontRef idx="minor">
+            <a:schemeClr val="lt1"/>
+          </a:fontRef>
+        </p:style>
+        <p:txBody>
+          <a:bodyPr rtlCol="0" anchor="ctr"/>
+          <a:lstStyle/>
+          <a:p>
+            <a:pPr algn="ctr"/>
+          </a:p>
+        </p:txBody>
+      </p:sp>
+      <p:sp>
+        <p:nvSpPr>
+          <p:cNvPr id="14" name="TextBox 13"/>
+          <p:cNvSpPr txBox="1"/>
+          <p:nvPr/>
+        </p:nvSpPr>
+        <p:spPr>
+          <a:xfrm>
+            <a:off x="8229600" y="2359152"/>
+            <a:ext cx="2103120" cy="731520"/>
+          </a:xfrm>
+          <a:prstGeom prst="rect">
+            <a:avLst/>
+          </a:prstGeom>
+          <a:noFill/>
+        </p:spPr>
+        <p:txBody>
+          <a:bodyPr wrap="square" anchor="t">
+            <a:spAutoFit/>
+          </a:bodyPr>
+          <a:lstStyle/>
+          <a:p>
+            <a:pPr algn="l">
+              <a:spcAft>
                 <a:spcPts val="200"/>
               </a:spcAft>
             </a:pPr>
             <a:r>
-              <a:rPr sz="1900" b="1" i="0">
+              <a:rPr sz="1800" b="1" i="0">
                 <a:solidFill>
                   <a:srgbClr val="0F172A"/>
                 </a:solidFill>
                 <a:latin typeface="Arial"/>
               </a:rPr>
-              <a:t>Normalise every provider into one shape</a:t>
+              <a:t>Train B</a:t>
             </a:r>
           </a:p>
           <a:p>
             <a:pPr>
               <a:spcAft>
-                <a:spcPts val="1600"/>
-              </a:spcAft>
-            </a:pPr>
-            <a:r>
-              <a:rPr sz="1500" b="0" i="0">
+                <a:spcPts val="0"/>
+              </a:spcAft>
+            </a:pPr>
+            <a:r>
+              <a:rPr sz="1200" b="0" i="0">
                 <a:solidFill>
                   <a:srgbClr val="64748B"/>
                 </a:solidFill>
                 <a:latin typeface="Arial"/>
               </a:rPr>
-              <a:t>Providers disagree on field names and status formats. One adapter handles it, so swapping providers changes nothing downstream.</a:t>
+              <a:t>Leg two</a:t>
+            </a:r>
+          </a:p>
+        </p:txBody>
+      </p:sp>
+      <p:sp>
+        <p:nvSpPr>
+          <p:cNvPr id="15" name="Right Arrow 14"/>
+          <p:cNvSpPr/>
+          <p:nvPr/>
+        </p:nvSpPr>
+        <p:spPr>
+          <a:xfrm>
+            <a:off x="3264408" y="2542032"/>
+            <a:ext cx="914400" cy="274320"/>
+          </a:xfrm>
+          <a:prstGeom prst="rightArrow">
+            <a:avLst/>
+          </a:prstGeom>
+          <a:solidFill>
+            <a:srgbClr val="CBD5E1"/>
+          </a:solidFill>
+          <a:ln>
+            <a:noFill/>
+          </a:ln>
+          <a:effectLst/>
+        </p:spPr>
+        <p:style>
+          <a:lnRef idx="1">
+            <a:schemeClr val="accent1"/>
+          </a:lnRef>
+          <a:fillRef idx="3">
+            <a:schemeClr val="accent1"/>
+          </a:fillRef>
+          <a:effectRef idx="2">
+            <a:schemeClr val="accent1"/>
+          </a:effectRef>
+          <a:fontRef idx="minor">
+            <a:schemeClr val="lt1"/>
+          </a:fontRef>
+        </p:style>
+        <p:txBody>
+          <a:bodyPr rtlCol="0" anchor="ctr"/>
+          <a:lstStyle/>
+          <a:p>
+            <a:pPr algn="ctr"/>
+          </a:p>
+        </p:txBody>
+      </p:sp>
+      <p:sp>
+        <p:nvSpPr>
+          <p:cNvPr id="16" name="Right Arrow 15"/>
+          <p:cNvSpPr/>
+          <p:nvPr/>
+        </p:nvSpPr>
+        <p:spPr>
+          <a:xfrm>
+            <a:off x="6922008" y="2542032"/>
+            <a:ext cx="914400" cy="274320"/>
+          </a:xfrm>
+          <a:prstGeom prst="rightArrow">
+            <a:avLst/>
+          </a:prstGeom>
+          <a:solidFill>
+            <a:srgbClr val="CBD5E1"/>
+          </a:solidFill>
+          <a:ln>
+            <a:noFill/>
+          </a:ln>
+          <a:effectLst/>
+        </p:spPr>
+        <p:style>
+          <a:lnRef idx="1">
+            <a:schemeClr val="accent1"/>
+          </a:lnRef>
+          <a:fillRef idx="3">
+            <a:schemeClr val="accent1"/>
+          </a:fillRef>
+          <a:effectRef idx="2">
+            <a:schemeClr val="accent1"/>
+          </a:effectRef>
+          <a:fontRef idx="minor">
+            <a:schemeClr val="lt1"/>
+          </a:fontRef>
+        </p:style>
+        <p:txBody>
+          <a:bodyPr rtlCol="0" anchor="ctr"/>
+          <a:lstStyle/>
+          <a:p>
+            <a:pPr algn="ctr"/>
+          </a:p>
+        </p:txBody>
+      </p:sp>
+      <p:sp>
+        <p:nvSpPr>
+          <p:cNvPr id="17" name="TextBox 16"/>
+          <p:cNvSpPr txBox="1"/>
+          <p:nvPr/>
+        </p:nvSpPr>
+        <p:spPr>
+          <a:xfrm>
+            <a:off x="658368" y="3575304"/>
+            <a:ext cx="2926080" cy="1828800"/>
+          </a:xfrm>
+          <a:prstGeom prst="rect">
+            <a:avLst/>
+          </a:prstGeom>
+          <a:noFill/>
+        </p:spPr>
+        <p:txBody>
+          <a:bodyPr wrap="square" anchor="t">
+            <a:spAutoFit/>
+          </a:bodyPr>
+          <a:lstStyle/>
+          <a:p>
+            <a:pPr algn="l">
+              <a:spcAft>
+                <a:spcPts val="500"/>
+              </a:spcAft>
+            </a:pPr>
+            <a:r>
+              <a:rPr sz="1400" b="1" i="0">
+                <a:solidFill>
+                  <a:srgbClr val="0F172A"/>
+                </a:solidFill>
+                <a:latin typeface="Arial"/>
+              </a:rPr>
+              <a:t>Risk 1 — leg one never confirms</a:t>
             </a:r>
           </a:p>
           <a:p>
             <a:pPr>
               <a:spcAft>
-                <a:spcPts val="200"/>
-              </a:spcAft>
-            </a:pPr>
-            <a:r>
-              <a:rPr sz="1900" b="1" i="0">
+                <a:spcPts val="0"/>
+              </a:spcAft>
+            </a:pPr>
+            <a:r>
+              <a:rPr sz="1300" b="0" i="0">
+                <a:solidFill>
+                  <a:srgbClr val="64748B"/>
+                </a:solidFill>
+                <a:latin typeface="Arial"/>
+              </a:rPr>
+              <a:t>The confirmation model scores this before the passenger commits to the journey.</a:t>
+            </a:r>
+          </a:p>
+        </p:txBody>
+      </p:sp>
+      <p:sp>
+        <p:nvSpPr>
+          <p:cNvPr id="18" name="TextBox 17"/>
+          <p:cNvSpPr txBox="1"/>
+          <p:nvPr/>
+        </p:nvSpPr>
+        <p:spPr>
+          <a:xfrm>
+            <a:off x="4315968" y="3575304"/>
+            <a:ext cx="2926080" cy="1828800"/>
+          </a:xfrm>
+          <a:prstGeom prst="rect">
+            <a:avLst/>
+          </a:prstGeom>
+          <a:noFill/>
+        </p:spPr>
+        <p:txBody>
+          <a:bodyPr wrap="square" anchor="t">
+            <a:spAutoFit/>
+          </a:bodyPr>
+          <a:lstStyle/>
+          <a:p>
+            <a:pPr algn="l">
+              <a:spcAft>
+                <a:spcPts val="500"/>
+              </a:spcAft>
+            </a:pPr>
+            <a:r>
+              <a:rPr sz="1400" b="1" i="0">
                 <a:solidFill>
                   <a:srgbClr val="0F172A"/>
                 </a:solidFill>
                 <a:latin typeface="Arial"/>
               </a:rPr>
-              <a:t>Predict confirmation</a:t>
+              <a:t>Risk 2 — the delay eats the layover</a:t>
             </a:r>
           </a:p>
           <a:p>
             <a:pPr>
               <a:spcAft>
-                <a:spcPts val="1600"/>
-              </a:spcAft>
-            </a:pPr>
-            <a:r>
-              <a:rPr sz="1500" b="0" i="0">
+                <a:spcPts val="0"/>
+              </a:spcAft>
+            </a:pPr>
+            <a:r>
+              <a:rPr sz="1300" b="0" i="0">
                 <a:solidFill>
                   <a:srgbClr val="64748B"/>
                 </a:solidFill>
                 <a:latin typeface="Arial"/>
               </a:rPr>
-              <a:t>Gradient boosting model over travel class, booking position, current position and days remaining — all read directly from the lookup, nothing estimated.</a:t>
+              <a:t>The first train's historical delay behaviour is compared against the time available at the junction.</a:t>
+            </a:r>
+          </a:p>
+        </p:txBody>
+      </p:sp>
+      <p:sp>
+        <p:nvSpPr>
+          <p:cNvPr id="19" name="TextBox 18"/>
+          <p:cNvSpPr txBox="1"/>
+          <p:nvPr/>
+        </p:nvSpPr>
+        <p:spPr>
+          <a:xfrm>
+            <a:off x="7973568" y="3575304"/>
+            <a:ext cx="2926080" cy="1828800"/>
+          </a:xfrm>
+          <a:prstGeom prst="rect">
+            <a:avLst/>
+          </a:prstGeom>
+          <a:noFill/>
+        </p:spPr>
+        <p:txBody>
+          <a:bodyPr wrap="square" anchor="t">
+            <a:spAutoFit/>
+          </a:bodyPr>
+          <a:lstStyle/>
+          <a:p>
+            <a:pPr algn="l">
+              <a:spcAft>
+                <a:spcPts val="500"/>
+              </a:spcAft>
+            </a:pPr>
+            <a:r>
+              <a:rPr sz="1400" b="1" i="0">
+                <a:solidFill>
+                  <a:srgbClr val="0F172A"/>
+                </a:solidFill>
+                <a:latin typeface="Arial"/>
+              </a:rPr>
+              <a:t>Risk 3 — leg two never confirms</a:t>
             </a:r>
           </a:p>
           <a:p>
             <a:pPr>
               <a:spcAft>
-                <a:spcPts val="200"/>
-              </a:spcAft>
-            </a:pPr>
-            <a:r>
-              <a:rPr sz="1900" b="1" i="0">
+                <a:spcPts val="0"/>
+              </a:spcAft>
+            </a:pPr>
+            <a:r>
+              <a:rPr sz="1300" b="0" i="0">
+                <a:solidFill>
+                  <a:srgbClr val="64748B"/>
+                </a:solidFill>
+                <a:latin typeface="Arial"/>
+              </a:rPr>
+              <a:t>Scored independently by the same model, then combined into one journey-level number.</a:t>
+            </a:r>
+          </a:p>
+        </p:txBody>
+      </p:sp>
+      <p:sp>
+        <p:nvSpPr>
+          <p:cNvPr id="20" name="TextBox 19"/>
+          <p:cNvSpPr txBox="1"/>
+          <p:nvPr/>
+        </p:nvSpPr>
+        <p:spPr>
+          <a:xfrm>
+            <a:off x="658368" y="6080760"/>
+            <a:ext cx="10874959" cy="411480"/>
+          </a:xfrm>
+          <a:prstGeom prst="rect">
+            <a:avLst/>
+          </a:prstGeom>
+          <a:noFill/>
+        </p:spPr>
+        <p:txBody>
+          <a:bodyPr wrap="square" anchor="t">
+            <a:spAutoFit/>
+          </a:bodyPr>
+          <a:lstStyle/>
+          <a:p>
+            <a:pPr algn="l">
+              <a:spcAft>
+                <a:spcPts val="0"/>
+              </a:spcAft>
+            </a:pPr>
+            <a:r>
+              <a:rPr sz="1300" b="0" i="0">
                 <a:solidFill>
                   <a:srgbClr val="0F172A"/>
                 </a:solidFill>
                 <a:latin typeface="Arial"/>
               </a:rPr>
-              <a:t>Score the connection</a:t>
-            </a:r>
-          </a:p>
-          <a:p>
-            <a:pPr>
-              <a:spcAft>
-                <a:spcPts val="1600"/>
-              </a:spcAft>
-            </a:pPr>
-            <a:r>
-              <a:rPr sz="1500" b="0" i="0">
-                <a:solidFill>
-                  <a:srgbClr val="64748B"/>
-                </a:solidFill>
-                <a:latin typeface="Arial"/>
-              </a:rPr>
-              <a:t>For multi-leg journeys, combine each leg's confirmation probability with the historical delay distribution of the first train against the layover time.</a:t>
+              <a:t>The passenger sees one number for the whole journey, not three separate ones they have to reason about.</a:t>
             </a:r>
           </a:p>
         </p:txBody>
@@ -7152,7 +5721,7 @@
                 </a:solidFill>
                 <a:latin typeface="Arial"/>
               </a:rPr>
-              <a:t>REAL DATA</a:t>
+              <a:t>CAPABILITY 04  ·  OPERATIONS</a:t>
             </a:r>
           </a:p>
         </p:txBody>
@@ -7191,7 +5760,7 @@
                 </a:solidFill>
                 <a:latin typeface="Arial"/>
               </a:rPr>
-              <a:t>We only trained on data we verified</a:t>
+              <a:t>The view the railway does not currently have</a:t>
             </a:r>
           </a:p>
         </p:txBody>
@@ -7240,404 +5809,16 @@
           </a:p>
         </p:txBody>
       </p:sp>
-      <p:graphicFrame>
-        <p:nvGraphicFramePr>
-          <p:cNvPr id="6" name="Table 5"/>
-          <p:cNvGraphicFramePr>
-            <a:graphicFrameLocks noGrp="1"/>
-          </p:cNvGraphicFramePr>
-          <p:nvPr/>
-        </p:nvGraphicFramePr>
-        <p:xfrm>
-          <a:off x="658368" y="1700784"/>
-          <a:ext cx="10874957" cy="1828800"/>
-        </p:xfrm>
-        <a:graphic>
-          <a:graphicData uri="http://schemas.openxmlformats.org/drawingml/2006/table">
-            <a:tbl>
-              <a:tblPr firstRow="1" bandRow="1">
-                <a:tableStyleId>{5C22544A-7EE6-4342-B048-85BDC9FD1C3A}</a:tableStyleId>
-              </a:tblPr>
-              <a:tblGrid>
-                <a:gridCol w="2718739"/>
-                <a:gridCol w="1196245"/>
-                <a:gridCol w="5002481"/>
-                <a:gridCol w="1957492"/>
-              </a:tblGrid>
-              <a:tr h="457200">
-                <a:tc>
-                  <a:txBody>
-                    <a:bodyPr/>
-                    <a:lstStyle/>
-                    <a:p>
-                      <a:r>
-                        <a:rPr sz="1200" b="1">
-                          <a:solidFill>
-                            <a:srgbClr val="FFFFFF"/>
-                          </a:solidFill>
-                          <a:latin typeface="Arial"/>
-                        </a:rPr>
-                        <a:t>Dataset</a:t>
-                      </a:r>
-                    </a:p>
-                  </a:txBody>
-                  <a:tcPr anchor="ctr">
-                    <a:solidFill>
-                      <a:srgbClr val="0F172A"/>
-                    </a:solidFill>
-                  </a:tcPr>
-                </a:tc>
-                <a:tc>
-                  <a:txBody>
-                    <a:bodyPr/>
-                    <a:lstStyle/>
-                    <a:p>
-                      <a:r>
-                        <a:rPr sz="1200" b="1">
-                          <a:solidFill>
-                            <a:srgbClr val="FFFFFF"/>
-                          </a:solidFill>
-                          <a:latin typeface="Arial"/>
-                        </a:rPr>
-                        <a:t>Rows</a:t>
-                      </a:r>
-                    </a:p>
-                  </a:txBody>
-                  <a:tcPr anchor="ctr">
-                    <a:solidFill>
-                      <a:srgbClr val="0F172A"/>
-                    </a:solidFill>
-                  </a:tcPr>
-                </a:tc>
-                <a:tc>
-                  <a:txBody>
-                    <a:bodyPr/>
-                    <a:lstStyle/>
-                    <a:p>
-                      <a:r>
-                        <a:rPr sz="1200" b="1">
-                          <a:solidFill>
-                            <a:srgbClr val="FFFFFF"/>
-                          </a:solidFill>
-                          <a:latin typeface="Arial"/>
-                        </a:rPr>
-                        <a:t>Finding</a:t>
-                      </a:r>
-                    </a:p>
-                  </a:txBody>
-                  <a:tcPr anchor="ctr">
-                    <a:solidFill>
-                      <a:srgbClr val="0F172A"/>
-                    </a:solidFill>
-                  </a:tcPr>
-                </a:tc>
-                <a:tc>
-                  <a:txBody>
-                    <a:bodyPr/>
-                    <a:lstStyle/>
-                    <a:p>
-                      <a:r>
-                        <a:rPr sz="1200" b="1">
-                          <a:solidFill>
-                            <a:srgbClr val="FFFFFF"/>
-                          </a:solidFill>
-                          <a:latin typeface="Arial"/>
-                        </a:rPr>
-                        <a:t>Verdict</a:t>
-                      </a:r>
-                    </a:p>
-                  </a:txBody>
-                  <a:tcPr anchor="ctr">
-                    <a:solidFill>
-                      <a:srgbClr val="0F172A"/>
-                    </a:solidFill>
-                  </a:tcPr>
-                </a:tc>
-              </a:tr>
-              <a:tr h="457200">
-                <a:tc>
-                  <a:txBody>
-                    <a:bodyPr/>
-                    <a:lstStyle/>
-                    <a:p>
-                      <a:r>
-                        <a:rPr sz="1200" b="0">
-                          <a:solidFill>
-                            <a:srgbClr val="0F172A"/>
-                          </a:solidFill>
-                          <a:latin typeface="Arial"/>
-                        </a:rPr>
-                        <a:t>Railway Waitinglist</a:t>
-                      </a:r>
-                    </a:p>
-                  </a:txBody>
-                  <a:tcPr anchor="ctr">
-                    <a:solidFill>
-                      <a:srgbClr val="FFFFFF"/>
-                    </a:solidFill>
-                  </a:tcPr>
-                </a:tc>
-                <a:tc>
-                  <a:txBody>
-                    <a:bodyPr/>
-                    <a:lstStyle/>
-                    <a:p>
-                      <a:r>
-                        <a:rPr sz="1200" b="0">
-                          <a:solidFill>
-                            <a:srgbClr val="0F172A"/>
-                          </a:solidFill>
-                          <a:latin typeface="Arial"/>
-                        </a:rPr>
-                        <a:t>53,381</a:t>
-                      </a:r>
-                    </a:p>
-                  </a:txBody>
-                  <a:tcPr anchor="ctr">
-                    <a:solidFill>
-                      <a:srgbClr val="FFFFFF"/>
-                    </a:solidFill>
-                  </a:tcPr>
-                </a:tc>
-                <a:tc>
-                  <a:txBody>
-                    <a:bodyPr/>
-                    <a:lstStyle/>
-                    <a:p>
-                      <a:r>
-                        <a:rPr sz="1200" b="0">
-                          <a:solidFill>
-                            <a:srgbClr val="0F172A"/>
-                          </a:solidFill>
-                          <a:latin typeface="Arial"/>
-                        </a:rPr>
-                        <a:t>Real. Confirmation falls cleanly with waitlist position, class mix matches reality.</a:t>
-                      </a:r>
-                    </a:p>
-                  </a:txBody>
-                  <a:tcPr anchor="ctr">
-                    <a:solidFill>
-                      <a:srgbClr val="FFFFFF"/>
-                    </a:solidFill>
-                  </a:tcPr>
-                </a:tc>
-                <a:tc>
-                  <a:txBody>
-                    <a:bodyPr/>
-                    <a:lstStyle/>
-                    <a:p>
-                      <a:r>
-                        <a:rPr sz="1200" b="1">
-                          <a:solidFill>
-                            <a:srgbClr val="059669"/>
-                          </a:solidFill>
-                          <a:latin typeface="Arial"/>
-                        </a:rPr>
-                        <a:t>USED</a:t>
-                      </a:r>
-                    </a:p>
-                  </a:txBody>
-                  <a:tcPr anchor="ctr">
-                    <a:solidFill>
-                      <a:srgbClr val="FFFFFF"/>
-                    </a:solidFill>
-                  </a:tcPr>
-                </a:tc>
-              </a:tr>
-              <a:tr h="457200">
-                <a:tc>
-                  <a:txBody>
-                    <a:bodyPr/>
-                    <a:lstStyle/>
-                    <a:p>
-                      <a:r>
-                        <a:rPr sz="1200" b="0">
-                          <a:solidFill>
-                            <a:srgbClr val="0F172A"/>
-                          </a:solidFill>
-                          <a:latin typeface="Arial"/>
-                        </a:rPr>
-                        <a:t>Railway Ticket Confirmation</a:t>
-                      </a:r>
-                    </a:p>
-                  </a:txBody>
-                  <a:tcPr anchor="ctr">
-                    <a:solidFill>
-                      <a:srgbClr val="F1F5F9"/>
-                    </a:solidFill>
-                  </a:tcPr>
-                </a:tc>
-                <a:tc>
-                  <a:txBody>
-                    <a:bodyPr/>
-                    <a:lstStyle/>
-                    <a:p>
-                      <a:r>
-                        <a:rPr sz="1200" b="0">
-                          <a:solidFill>
-                            <a:srgbClr val="0F172A"/>
-                          </a:solidFill>
-                          <a:latin typeface="Arial"/>
-                        </a:rPr>
-                        <a:t>30,000</a:t>
-                      </a:r>
-                    </a:p>
-                  </a:txBody>
-                  <a:tcPr anchor="ctr">
-                    <a:solidFill>
-                      <a:srgbClr val="F1F5F9"/>
-                    </a:solidFill>
-                  </a:tcPr>
-                </a:tc>
-                <a:tc>
-                  <a:txBody>
-                    <a:bodyPr/>
-                    <a:lstStyle/>
-                    <a:p>
-                      <a:r>
-                        <a:rPr sz="1200" b="0">
-                          <a:solidFill>
-                            <a:srgbClr val="0F172A"/>
-                          </a:solidFill>
-                          <a:latin typeface="Arial"/>
-                        </a:rPr>
-                        <a:t>Fabricated. Sequential PNRs, Shatabdi trains with sleeper class, label was a tautology.</a:t>
-                      </a:r>
-                    </a:p>
-                  </a:txBody>
-                  <a:tcPr anchor="ctr">
-                    <a:solidFill>
-                      <a:srgbClr val="F1F5F9"/>
-                    </a:solidFill>
-                  </a:tcPr>
-                </a:tc>
-                <a:tc>
-                  <a:txBody>
-                    <a:bodyPr/>
-                    <a:lstStyle/>
-                    <a:p>
-                      <a:r>
-                        <a:rPr sz="1200" b="1">
-                          <a:solidFill>
-                            <a:srgbClr val="DC2626"/>
-                          </a:solidFill>
-                          <a:latin typeface="Arial"/>
-                        </a:rPr>
-                        <a:t>REJECTED</a:t>
-                      </a:r>
-                    </a:p>
-                  </a:txBody>
-                  <a:tcPr anchor="ctr">
-                    <a:solidFill>
-                      <a:srgbClr val="F1F5F9"/>
-                    </a:solidFill>
-                  </a:tcPr>
-                </a:tc>
-              </a:tr>
-              <a:tr h="457200">
-                <a:tc>
-                  <a:txBody>
-                    <a:bodyPr/>
-                    <a:lstStyle/>
-                    <a:p>
-                      <a:r>
-                        <a:rPr sz="1200" b="0">
-                          <a:solidFill>
-                            <a:srgbClr val="0F172A"/>
-                          </a:solidFill>
-                          <a:latin typeface="Arial"/>
-                        </a:rPr>
-                        <a:t>Railofy (competition)</a:t>
-                      </a:r>
-                    </a:p>
-                  </a:txBody>
-                  <a:tcPr anchor="ctr">
-                    <a:solidFill>
-                      <a:srgbClr val="FFFFFF"/>
-                    </a:solidFill>
-                  </a:tcPr>
-                </a:tc>
-                <a:tc>
-                  <a:txBody>
-                    <a:bodyPr/>
-                    <a:lstStyle/>
-                    <a:p>
-                      <a:r>
-                        <a:rPr sz="1200" b="0">
-                          <a:solidFill>
-                            <a:srgbClr val="0F172A"/>
-                          </a:solidFill>
-                          <a:latin typeface="Arial"/>
-                        </a:rPr>
-                        <a:t>36,775</a:t>
-                      </a:r>
-                    </a:p>
-                  </a:txBody>
-                  <a:tcPr anchor="ctr">
-                    <a:solidFill>
-                      <a:srgbClr val="FFFFFF"/>
-                    </a:solidFill>
-                  </a:tcPr>
-                </a:tc>
-                <a:tc>
-                  <a:txBody>
-                    <a:bodyPr/>
-                    <a:lstStyle/>
-                    <a:p>
-                      <a:r>
-                        <a:rPr sz="1200" b="0">
-                          <a:solidFill>
-                            <a:srgbClr val="0F172A"/>
-                          </a:solidFill>
-                          <a:latin typeface="Arial"/>
-                        </a:rPr>
-                        <a:t>Real and richer, but values are encoded and cannot accept a live PNR.</a:t>
-                      </a:r>
-                    </a:p>
-                  </a:txBody>
-                  <a:tcPr anchor="ctr">
-                    <a:solidFill>
-                      <a:srgbClr val="FFFFFF"/>
-                    </a:solidFill>
-                  </a:tcPr>
-                </a:tc>
-                <a:tc>
-                  <a:txBody>
-                    <a:bodyPr/>
-                    <a:lstStyle/>
-                    <a:p>
-                      <a:r>
-                        <a:rPr sz="1200" b="1">
-                          <a:solidFill>
-                            <a:srgbClr val="D97706"/>
-                          </a:solidFill>
-                          <a:latin typeface="Arial"/>
-                        </a:rPr>
-                        <a:t>BENCHMARK</a:t>
-                      </a:r>
-                    </a:p>
-                  </a:txBody>
-                  <a:tcPr anchor="ctr">
-                    <a:solidFill>
-                      <a:srgbClr val="FFFFFF"/>
-                    </a:solidFill>
-                  </a:tcPr>
-                </a:tc>
-              </a:tr>
-            </a:tbl>
-          </a:graphicData>
-        </a:graphic>
-      </p:graphicFrame>
-      <p:sp>
-        <p:nvSpPr>
-          <p:cNvPr id="7" name="TextBox 6"/>
+      <p:sp>
+        <p:nvSpPr>
+          <p:cNvPr id="6" name="TextBox 5"/>
           <p:cNvSpPr txBox="1"/>
           <p:nvPr/>
         </p:nvSpPr>
         <p:spPr>
           <a:xfrm>
-            <a:off x="658368" y="6126480"/>
-            <a:ext cx="10874959" cy="365760"/>
+            <a:off x="658368" y="1700784"/>
+            <a:ext cx="5760720" cy="4023360"/>
           </a:xfrm>
           <a:prstGeom prst="rect">
             <a:avLst/>
@@ -7652,17 +5833,269 @@
           <a:p>
             <a:pPr algn="l">
               <a:spcAft>
+                <a:spcPts val="1600"/>
+              </a:spcAft>
+            </a:pPr>
+            <a:r>
+              <a:rPr sz="1600" b="0" i="0">
+                <a:solidFill>
+                  <a:srgbClr val="0F172A"/>
+                </a:solidFill>
+                <a:latin typeface="Arial"/>
+              </a:rPr>
+              <a:t>Once the system knows every passenger's full journey, it knows something the railway does not:</a:t>
+            </a:r>
+          </a:p>
+          <a:p>
+            <a:pPr>
+              <a:spcAft>
+                <a:spcPts val="1600"/>
+              </a:spcAft>
+            </a:pPr>
+            <a:r>
+              <a:rPr sz="1900" b="1" i="0">
+                <a:solidFill>
+                  <a:srgbClr val="0F172A"/>
+                </a:solidFill>
+                <a:latin typeface="Arial"/>
+              </a:rPr>
+              <a:t>How many people on a delayed train are about to miss a specific connection, at a specific junction, right now.</a:t>
+            </a:r>
+          </a:p>
+          <a:p>
+            <a:pPr>
+              <a:spcAft>
                 <a:spcPts val="0"/>
               </a:spcAft>
             </a:pPr>
             <a:r>
-              <a:rPr sz="1100" b="0" i="1">
+              <a:rPr sz="1500" b="0" i="0">
                 <a:solidFill>
                   <a:srgbClr val="64748B"/>
                 </a:solidFill>
                 <a:latin typeface="Arial"/>
               </a:rPr>
-              <a:t>Our first model was trained on data we generated ourselves. We deleted it — the labels came from our own formula, so it could only re-learn our assumptions.</a:t>
+              <a:t>Today that handover is invisible. Each train is managed on its own schedule, so a late arrival and a punctual departure are treated as two unrelated events — even when the same passengers are on both.</a:t>
+            </a:r>
+          </a:p>
+        </p:txBody>
+      </p:sp>
+      <p:sp>
+        <p:nvSpPr>
+          <p:cNvPr id="7" name="Rounded Rectangle 6"/>
+          <p:cNvSpPr/>
+          <p:nvPr/>
+        </p:nvSpPr>
+        <p:spPr>
+          <a:xfrm>
+            <a:off x="6876288" y="1700784"/>
+            <a:ext cx="4657039" cy="3977639"/>
+          </a:xfrm>
+          <a:prstGeom prst="roundRect">
+            <a:avLst>
+              <a:gd name="adj" fmla="val 5000"/>
+            </a:avLst>
+          </a:prstGeom>
+          <a:solidFill>
+            <a:srgbClr val="0F172A"/>
+          </a:solidFill>
+          <a:ln>
+            <a:noFill/>
+          </a:ln>
+          <a:effectLst/>
+        </p:spPr>
+        <p:style>
+          <a:lnRef idx="1">
+            <a:schemeClr val="accent1"/>
+          </a:lnRef>
+          <a:fillRef idx="3">
+            <a:schemeClr val="accent1"/>
+          </a:fillRef>
+          <a:effectRef idx="2">
+            <a:schemeClr val="accent1"/>
+          </a:effectRef>
+          <a:fontRef idx="minor">
+            <a:schemeClr val="lt1"/>
+          </a:fontRef>
+        </p:style>
+        <p:txBody>
+          <a:bodyPr rtlCol="0" anchor="ctr"/>
+          <a:lstStyle/>
+          <a:p>
+            <a:pPr algn="ctr"/>
+          </a:p>
+        </p:txBody>
+      </p:sp>
+      <p:sp>
+        <p:nvSpPr>
+          <p:cNvPr id="8" name="TextBox 7"/>
+          <p:cNvSpPr txBox="1"/>
+          <p:nvPr/>
+        </p:nvSpPr>
+        <p:spPr>
+          <a:xfrm>
+            <a:off x="7242048" y="2020824"/>
+            <a:ext cx="3925519" cy="3383280"/>
+          </a:xfrm>
+          <a:prstGeom prst="rect">
+            <a:avLst/>
+          </a:prstGeom>
+          <a:noFill/>
+        </p:spPr>
+        <p:txBody>
+          <a:bodyPr wrap="square" anchor="t">
+            <a:spAutoFit/>
+          </a:bodyPr>
+          <a:lstStyle/>
+          <a:p>
+            <a:pPr algn="l">
+              <a:spcAft>
+                <a:spcPts val="1400"/>
+              </a:spcAft>
+            </a:pPr>
+            <a:r>
+              <a:rPr sz="1000" b="1" i="0">
+                <a:solidFill>
+                  <a:srgbClr val="0EA5E9"/>
+                </a:solidFill>
+                <a:latin typeface="Arial"/>
+              </a:rPr>
+              <a:t>WHAT A CONTROLLER WOULD SEE</a:t>
+            </a:r>
+          </a:p>
+          <a:p>
+            <a:pPr>
+              <a:spcAft>
+                <a:spcPts val="1000"/>
+              </a:spcAft>
+            </a:pPr>
+            <a:r>
+              <a:rPr sz="1500" b="1" i="0">
+                <a:solidFill>
+                  <a:srgbClr val="FFFFFF"/>
+                </a:solidFill>
+                <a:latin typeface="Arial"/>
+              </a:rPr>
+              <a:t>Train A is running late into this junction.</a:t>
+            </a:r>
+          </a:p>
+          <a:p>
+            <a:pPr>
+              <a:spcAft>
+                <a:spcPts val="1600"/>
+              </a:spcAft>
+            </a:pPr>
+            <a:r>
+              <a:rPr sz="1400" b="0" i="0">
+                <a:solidFill>
+                  <a:srgbClr val="CBD5E1"/>
+                </a:solidFill>
+                <a:latin typeface="Arial"/>
+              </a:rPr>
+              <a:t>A number of passengers on board are booked onto Train B, which is scheduled to depart before Train A now arrives.</a:t>
+            </a:r>
+          </a:p>
+          <a:p>
+            <a:pPr>
+              <a:spcAft>
+                <a:spcPts val="800"/>
+              </a:spcAft>
+            </a:pPr>
+            <a:r>
+              <a:rPr sz="1300" b="1" i="0">
+                <a:solidFill>
+                  <a:srgbClr val="0EA5E9"/>
+                </a:solidFill>
+                <a:latin typeface="Arial"/>
+              </a:rPr>
+              <a:t>So the choice becomes explicit:</a:t>
+            </a:r>
+          </a:p>
+          <a:p>
+            <a:pPr>
+              <a:spcAft>
+                <a:spcPts val="600"/>
+              </a:spcAft>
+            </a:pPr>
+            <a:r>
+              <a:rPr sz="1400" b="0" i="0">
+                <a:solidFill>
+                  <a:srgbClr val="FFFFFF"/>
+                </a:solidFill>
+                <a:latin typeface="Arial"/>
+              </a:rPr>
+              <a:t>•   Hold Train B briefly and keep them moving</a:t>
+            </a:r>
+          </a:p>
+          <a:p>
+            <a:pPr>
+              <a:spcAft>
+                <a:spcPts val="600"/>
+              </a:spcAft>
+            </a:pPr>
+            <a:r>
+              <a:rPr sz="1400" b="0" i="0">
+                <a:solidFill>
+                  <a:srgbClr val="FFFFFF"/>
+                </a:solidFill>
+                <a:latin typeface="Arial"/>
+              </a:rPr>
+              <a:t>•   Let it go and arrange for those passengers</a:t>
+            </a:r>
+          </a:p>
+          <a:p>
+            <a:pPr>
+              <a:spcAft>
+                <a:spcPts val="0"/>
+              </a:spcAft>
+            </a:pPr>
+            <a:r>
+              <a:rPr sz="1400" b="0" i="0">
+                <a:solidFill>
+                  <a:srgbClr val="FFFFFF"/>
+                </a:solidFill>
+                <a:latin typeface="Arial"/>
+              </a:rPr>
+              <a:t>•   Do nothing — but now it is a decision, not an oversight</a:t>
+            </a:r>
+          </a:p>
+        </p:txBody>
+      </p:sp>
+      <p:sp>
+        <p:nvSpPr>
+          <p:cNvPr id="9" name="TextBox 8"/>
+          <p:cNvSpPr txBox="1"/>
+          <p:nvPr/>
+        </p:nvSpPr>
+        <p:spPr>
+          <a:xfrm>
+            <a:off x="658368" y="6126480"/>
+            <a:ext cx="10874959" cy="365760"/>
+          </a:xfrm>
+          <a:prstGeom prst="rect">
+            <a:avLst/>
+          </a:prstGeom>
+          <a:noFill/>
+        </p:spPr>
+        <p:txBody>
+          <a:bodyPr wrap="square" anchor="t">
+            <a:spAutoFit/>
+          </a:bodyPr>
+          <a:lstStyle/>
+          <a:p>
+            <a:pPr algn="l">
+              <a:spcAft>
+                <a:spcPts val="0"/>
+              </a:spcAft>
+            </a:pPr>
+            <a:r>
+              <a:rPr sz="1200" b="0" i="1">
+                <a:solidFill>
+                  <a:srgbClr val="64748B"/>
+                </a:solidFill>
+                <a:latin typeface="Arial"/>
+              </a:rPr>
+              <a:t>A short, informed hold can protect a whole group of journeys. Without this view, nobody knows the hold was worth making.</a:t>
             </a:r>
           </a:p>
         </p:txBody>
@@ -7763,7 +6196,7 @@
                 </a:solidFill>
                 <a:latin typeface="Arial"/>
               </a:rPr>
-              <a:t>APPROACH</a:t>
+              <a:t>END TO END</a:t>
             </a:r>
           </a:p>
         </p:txBody>
@@ -7802,7 +6235,7 @@
                 </a:solidFill>
                 <a:latin typeface="Arial"/>
               </a:rPr>
-              <a:t>The model</a:t>
+              <a:t>How it works</a:t>
             </a:r>
           </a:p>
         </p:txBody>
@@ -7860,7 +6293,7 @@
         <p:spPr>
           <a:xfrm>
             <a:off x="658368" y="1700784"/>
-            <a:ext cx="5394960" cy="3931920"/>
+            <a:ext cx="10874959" cy="4334256"/>
           </a:xfrm>
           <a:prstGeom prst="rect">
             <a:avLst/>
@@ -7875,248 +6308,129 @@
           <a:p>
             <a:pPr algn="l">
               <a:spcAft>
-                <a:spcPts val="400"/>
-              </a:spcAft>
-            </a:pPr>
-            <a:r>
-              <a:rPr sz="1300" b="1" i="0">
-                <a:solidFill>
-                  <a:srgbClr val="0EA5E9"/>
-                </a:solidFill>
-                <a:latin typeface="Arial"/>
-              </a:rPr>
-              <a:t>Algorithm</a:t>
+                <a:spcPts val="300"/>
+              </a:spcAft>
+            </a:pPr>
+            <a:r>
+              <a:rPr sz="1900" b="1" i="0">
+                <a:solidFill>
+                  <a:srgbClr val="0F172A"/>
+                </a:solidFill>
+                <a:latin typeface="Arial"/>
+              </a:rPr>
+              <a:t>Read the ticket</a:t>
             </a:r>
           </a:p>
           <a:p>
             <a:pPr>
               <a:spcAft>
-                <a:spcPts val="1600"/>
-              </a:spcAft>
-            </a:pPr>
-            <a:r>
-              <a:rPr sz="1600" b="0" i="0">
+                <a:spcPts val="1700"/>
+              </a:spcAft>
+            </a:pPr>
+            <a:r>
+              <a:rPr sz="1500" b="0" i="0">
+                <a:solidFill>
+                  <a:srgbClr val="64748B"/>
+                </a:solidFill>
+                <a:latin typeface="Arial"/>
+              </a:rPr>
+              <a:t>A PNR lookup returns train, class, quota, booking status and current status. One adapter normalises every provider into a single internal shape.</a:t>
+            </a:r>
+          </a:p>
+          <a:p>
+            <a:pPr>
+              <a:spcAft>
+                <a:spcPts val="300"/>
+              </a:spcAft>
+            </a:pPr>
+            <a:r>
+              <a:rPr sz="1900" b="1" i="0">
                 <a:solidFill>
                   <a:srgbClr val="0F172A"/>
                 </a:solidFill>
                 <a:latin typeface="Arial"/>
               </a:rPr>
-              <a:t>Histogram gradient boosting classifier</a:t>
+              <a:t>Predict confirmation</a:t>
             </a:r>
           </a:p>
           <a:p>
             <a:pPr>
               <a:spcAft>
-                <a:spcPts val="400"/>
-              </a:spcAft>
-            </a:pPr>
-            <a:r>
-              <a:rPr sz="1300" b="1" i="0">
-                <a:solidFill>
-                  <a:srgbClr val="0EA5E9"/>
-                </a:solidFill>
-                <a:latin typeface="Arial"/>
-              </a:rPr>
-              <a:t>Trained on</a:t>
+                <a:spcPts val="1700"/>
+              </a:spcAft>
+            </a:pPr>
+            <a:r>
+              <a:rPr sz="1500" b="0" i="0">
+                <a:solidFill>
+                  <a:srgbClr val="64748B"/>
+                </a:solidFill>
+                <a:latin typeface="Arial"/>
+              </a:rPr>
+              <a:t>A machine learning model trained on real waitlisted tickets scores each leg, and explains which factors moved the number.</a:t>
             </a:r>
           </a:p>
           <a:p>
             <a:pPr>
               <a:spcAft>
-                <a:spcPts val="400"/>
-              </a:spcAft>
-            </a:pPr>
-            <a:r>
-              <a:rPr sz="1600" b="0" i="0">
+                <a:spcPts val="300"/>
+              </a:spcAft>
+            </a:pPr>
+            <a:r>
+              <a:rPr sz="1900" b="1" i="0">
                 <a:solidFill>
                   <a:srgbClr val="0F172A"/>
                 </a:solidFill>
                 <a:latin typeface="Arial"/>
               </a:rPr>
-              <a:t>28,748 real waitlisted tickets</a:t>
+              <a:t>Build and score routes</a:t>
             </a:r>
           </a:p>
           <a:p>
             <a:pPr>
               <a:spcAft>
-                <a:spcPts val="1600"/>
-              </a:spcAft>
-            </a:pPr>
-            <a:r>
-              <a:rPr sz="1300" b="0" i="0">
+                <a:spcPts val="1700"/>
+              </a:spcAft>
+            </a:pPr>
+            <a:r>
+              <a:rPr sz="1500" b="0" i="0">
                 <a:solidFill>
                   <a:srgbClr val="64748B"/>
                 </a:solidFill>
                 <a:latin typeface="Arial"/>
               </a:rPr>
-              <a:t>Observed at 30, 7 and 2 days before travel — matching what the app knows at prediction time.</a:t>
+              <a:t>Direct and multi-leg options between two cities, each scored for confirmation and for the risk that a delay breaks the connection.</a:t>
             </a:r>
           </a:p>
           <a:p>
             <a:pPr>
               <a:spcAft>
-                <a:spcPts val="400"/>
-              </a:spcAft>
-            </a:pPr>
-            <a:r>
-              <a:rPr sz="1300" b="1" i="0">
-                <a:solidFill>
-                  <a:srgbClr val="0EA5E9"/>
-                </a:solidFill>
-                <a:latin typeface="Arial"/>
-              </a:rPr>
-              <a:t>Validation</a:t>
+                <a:spcPts val="300"/>
+              </a:spcAft>
+            </a:pPr>
+            <a:r>
+              <a:rPr sz="1900" b="1" i="0">
+                <a:solidFill>
+                  <a:srgbClr val="0F172A"/>
+                </a:solidFill>
+                <a:latin typeface="Arial"/>
+              </a:rPr>
+              <a:t>Aggregate for operations</a:t>
             </a:r>
           </a:p>
           <a:p>
             <a:pPr>
               <a:spcAft>
-                <a:spcPts val="400"/>
-              </a:spcAft>
-            </a:pPr>
-            <a:r>
-              <a:rPr sz="1600" b="0" i="0">
-                <a:solidFill>
-                  <a:srgbClr val="0F172A"/>
-                </a:solidFill>
-                <a:latin typeface="Arial"/>
-              </a:rPr>
-              <a:t>Grouped train/test split</a:t>
-            </a:r>
-          </a:p>
-          <a:p>
-            <a:pPr>
-              <a:spcAft>
-                <a:spcPts val="0"/>
-              </a:spcAft>
-            </a:pPr>
-            <a:r>
-              <a:rPr sz="1300" b="0" i="0">
+                <a:spcPts val="1700"/>
+              </a:spcAft>
+            </a:pPr>
+            <a:r>
+              <a:rPr sz="1500" b="0" i="0">
                 <a:solidFill>
                   <a:srgbClr val="64748B"/>
                 </a:solidFill>
                 <a:latin typeface="Arial"/>
               </a:rPr>
-              <a:t>One ticket never appears on both sides, so the score is not inflated by leakage.</a:t>
-            </a:r>
-          </a:p>
-        </p:txBody>
-      </p:sp>
-      <p:sp>
-        <p:nvSpPr>
-          <p:cNvPr id="7" name="TextBox 6"/>
-          <p:cNvSpPr txBox="1"/>
-          <p:nvPr/>
-        </p:nvSpPr>
-        <p:spPr>
-          <a:xfrm>
-            <a:off x="6510528" y="1700784"/>
-            <a:ext cx="4663440" cy="3931920"/>
-          </a:xfrm>
-          <a:prstGeom prst="rect">
-            <a:avLst/>
-          </a:prstGeom>
-          <a:noFill/>
-        </p:spPr>
-        <p:txBody>
-          <a:bodyPr wrap="square" anchor="t">
-            <a:spAutoFit/>
-          </a:bodyPr>
-          <a:lstStyle/>
-          <a:p>
-            <a:pPr algn="l">
-              <a:spcAft>
-                <a:spcPts val="1000"/>
-              </a:spcAft>
-            </a:pPr>
-            <a:r>
-              <a:rPr sz="1300" b="1" i="0">
-                <a:solidFill>
-                  <a:srgbClr val="0EA5E9"/>
-                </a:solidFill>
-                <a:latin typeface="Arial"/>
-              </a:rPr>
-              <a:t>INPUTS</a:t>
-            </a:r>
-          </a:p>
-          <a:p>
-            <a:pPr>
-              <a:spcAft>
-                <a:spcPts val="1000"/>
-              </a:spcAft>
-            </a:pPr>
-            <a:r>
-              <a:rPr sz="1600" b="0" i="0">
-                <a:solidFill>
-                  <a:srgbClr val="0F172A"/>
-                </a:solidFill>
-                <a:latin typeface="Arial"/>
-              </a:rPr>
-              <a:t>•   Travel class</a:t>
-            </a:r>
-          </a:p>
-          <a:p>
-            <a:pPr>
-              <a:spcAft>
-                <a:spcPts val="1000"/>
-              </a:spcAft>
-            </a:pPr>
-            <a:r>
-              <a:rPr sz="1600" b="0" i="0">
-                <a:solidFill>
-                  <a:srgbClr val="0F172A"/>
-                </a:solidFill>
-                <a:latin typeface="Arial"/>
-              </a:rPr>
-              <a:t>•   Waitlist position when booked</a:t>
-            </a:r>
-          </a:p>
-          <a:p>
-            <a:pPr>
-              <a:spcAft>
-                <a:spcPts val="1000"/>
-              </a:spcAft>
-            </a:pPr>
-            <a:r>
-              <a:rPr sz="1600" b="0" i="0">
-                <a:solidFill>
-                  <a:srgbClr val="0F172A"/>
-                </a:solidFill>
-                <a:latin typeface="Arial"/>
-              </a:rPr>
-              <a:t>•   Current waitlist position</a:t>
-            </a:r>
-          </a:p>
-          <a:p>
-            <a:pPr>
-              <a:spcAft>
-                <a:spcPts val="1000"/>
-              </a:spcAft>
-            </a:pPr>
-            <a:r>
-              <a:rPr sz="1600" b="0" i="0">
-                <a:solidFill>
-                  <a:srgbClr val="0F172A"/>
-                </a:solidFill>
-                <a:latin typeface="Arial"/>
-              </a:rPr>
-              <a:t>•   Days until journey</a:t>
-            </a:r>
-          </a:p>
-          <a:p>
-            <a:pPr>
-              <a:spcAft>
-                <a:spcPts val="0"/>
-              </a:spcAft>
-            </a:pPr>
-            <a:r>
-              <a:rPr sz="1300" b="0" i="0">
-                <a:solidFill>
-                  <a:srgbClr val="64748B"/>
-                </a:solidFill>
-                <a:latin typeface="Arial"/>
-              </a:rPr>
-              <a:t>Each read straight from the PNR lookup. Nothing used in training that the live system cannot obtain.</a:t>
+              <a:t>Passenger journeys sharing an interchange are grouped by junction and train pair, turning individual risk into a decision staff can act on.</a:t>
             </a:r>
           </a:p>
         </p:txBody>
@@ -8217,7 +6531,7 @@
                 </a:solidFill>
                 <a:latin typeface="Arial"/>
               </a:rPr>
-              <a:t>MEASURED ON REAL TICKETS</a:t>
+              <a:t>UNDER THE HOOD</a:t>
             </a:r>
           </a:p>
         </p:txBody>
@@ -8256,7 +6570,7 @@
                 </a:solidFill>
                 <a:latin typeface="Arial"/>
               </a:rPr>
-              <a:t>These are the determining factors</a:t>
+              <a:t>The prediction engine</a:t>
             </a:r>
           </a:p>
         </p:txBody>
@@ -8305,315 +6619,16 @@
           </a:p>
         </p:txBody>
       </p:sp>
-      <p:graphicFrame>
-        <p:nvGraphicFramePr>
-          <p:cNvPr id="6" name="Table 5"/>
-          <p:cNvGraphicFramePr>
-            <a:graphicFrameLocks noGrp="1"/>
-          </p:cNvGraphicFramePr>
-          <p:nvPr/>
-        </p:nvGraphicFramePr>
-        <p:xfrm>
-          <a:off x="658368" y="1700784"/>
-          <a:ext cx="10874957" cy="1828800"/>
-        </p:xfrm>
-        <a:graphic>
-          <a:graphicData uri="http://schemas.openxmlformats.org/drawingml/2006/table">
-            <a:tbl>
-              <a:tblPr firstRow="1" bandRow="1">
-                <a:tableStyleId>{5C22544A-7EE6-4342-B048-85BDC9FD1C3A}</a:tableStyleId>
-              </a:tblPr>
-              <a:tblGrid>
-                <a:gridCol w="3044988"/>
-                <a:gridCol w="5654978"/>
-                <a:gridCol w="2174991"/>
-              </a:tblGrid>
-              <a:tr h="457200">
-                <a:tc>
-                  <a:txBody>
-                    <a:bodyPr/>
-                    <a:lstStyle/>
-                    <a:p>
-                      <a:r>
-                        <a:rPr sz="1200" b="1">
-                          <a:solidFill>
-                            <a:srgbClr val="FFFFFF"/>
-                          </a:solidFill>
-                          <a:latin typeface="Arial"/>
-                        </a:rPr>
-                        <a:t>Factor</a:t>
-                      </a:r>
-                    </a:p>
-                  </a:txBody>
-                  <a:tcPr anchor="ctr">
-                    <a:solidFill>
-                      <a:srgbClr val="0F172A"/>
-                    </a:solidFill>
-                  </a:tcPr>
-                </a:tc>
-                <a:tc>
-                  <a:txBody>
-                    <a:bodyPr/>
-                    <a:lstStyle/>
-                    <a:p>
-                      <a:r>
-                        <a:rPr sz="1200" b="1">
-                          <a:solidFill>
-                            <a:srgbClr val="FFFFFF"/>
-                          </a:solidFill>
-                          <a:latin typeface="Arial"/>
-                        </a:rPr>
-                        <a:t>Measured effect</a:t>
-                      </a:r>
-                    </a:p>
-                  </a:txBody>
-                  <a:tcPr anchor="ctr">
-                    <a:solidFill>
-                      <a:srgbClr val="0F172A"/>
-                    </a:solidFill>
-                  </a:tcPr>
-                </a:tc>
-                <a:tc>
-                  <a:txBody>
-                    <a:bodyPr/>
-                    <a:lstStyle/>
-                    <a:p>
-                      <a:r>
-                        <a:rPr sz="1200" b="1">
-                          <a:solidFill>
-                            <a:srgbClr val="FFFFFF"/>
-                          </a:solidFill>
-                          <a:latin typeface="Arial"/>
-                        </a:rPr>
-                        <a:t>Spread</a:t>
-                      </a:r>
-                    </a:p>
-                  </a:txBody>
-                  <a:tcPr anchor="ctr">
-                    <a:solidFill>
-                      <a:srgbClr val="0F172A"/>
-                    </a:solidFill>
-                  </a:tcPr>
-                </a:tc>
-              </a:tr>
-              <a:tr h="457200">
-                <a:tc>
-                  <a:txBody>
-                    <a:bodyPr/>
-                    <a:lstStyle/>
-                    <a:p>
-                      <a:r>
-                        <a:rPr sz="1200" b="0">
-                          <a:solidFill>
-                            <a:srgbClr val="0F172A"/>
-                          </a:solidFill>
-                          <a:latin typeface="Arial"/>
-                        </a:rPr>
-                        <a:t>Waitlist position</a:t>
-                      </a:r>
-                    </a:p>
-                  </a:txBody>
-                  <a:tcPr anchor="ctr">
-                    <a:solidFill>
-                      <a:srgbClr val="FFFFFF"/>
-                    </a:solidFill>
-                  </a:tcPr>
-                </a:tc>
-                <a:tc>
-                  <a:txBody>
-                    <a:bodyPr/>
-                    <a:lstStyle/>
-                    <a:p>
-                      <a:r>
-                        <a:rPr sz="1200" b="0">
-                          <a:solidFill>
-                            <a:srgbClr val="0F172A"/>
-                          </a:solidFill>
-                          <a:latin typeface="Arial"/>
-                        </a:rPr>
-                        <a:t>12.9% confirm at WL 1–5, down to 0.2% at WL 60+</a:t>
-                      </a:r>
-                    </a:p>
-                  </a:txBody>
-                  <a:tcPr anchor="ctr">
-                    <a:solidFill>
-                      <a:srgbClr val="FFFFFF"/>
-                    </a:solidFill>
-                  </a:tcPr>
-                </a:tc>
-                <a:tc>
-                  <a:txBody>
-                    <a:bodyPr/>
-                    <a:lstStyle/>
-                    <a:p>
-                      <a:r>
-                        <a:rPr sz="1200" b="0">
-                          <a:solidFill>
-                            <a:srgbClr val="0F172A"/>
-                          </a:solidFill>
-                          <a:latin typeface="Arial"/>
-                        </a:rPr>
-                        <a:t>65×</a:t>
-                      </a:r>
-                    </a:p>
-                  </a:txBody>
-                  <a:tcPr anchor="ctr">
-                    <a:solidFill>
-                      <a:srgbClr val="FFFFFF"/>
-                    </a:solidFill>
-                  </a:tcPr>
-                </a:tc>
-              </a:tr>
-              <a:tr h="457200">
-                <a:tc>
-                  <a:txBody>
-                    <a:bodyPr/>
-                    <a:lstStyle/>
-                    <a:p>
-                      <a:r>
-                        <a:rPr sz="1200" b="0">
-                          <a:solidFill>
-                            <a:srgbClr val="0F172A"/>
-                          </a:solidFill>
-                          <a:latin typeface="Arial"/>
-                        </a:rPr>
-                        <a:t>Days until journey</a:t>
-                      </a:r>
-                    </a:p>
-                  </a:txBody>
-                  <a:tcPr anchor="ctr">
-                    <a:solidFill>
-                      <a:srgbClr val="F1F5F9"/>
-                    </a:solidFill>
-                  </a:tcPr>
-                </a:tc>
-                <a:tc>
-                  <a:txBody>
-                    <a:bodyPr/>
-                    <a:lstStyle/>
-                    <a:p>
-                      <a:r>
-                        <a:rPr sz="1200" b="0">
-                          <a:solidFill>
-                            <a:srgbClr val="0F172A"/>
-                          </a:solidFill>
-                          <a:latin typeface="Arial"/>
-                        </a:rPr>
-                        <a:t>6.6% at 30 days, 12.9% at 7 days, 15.1% at 2 days</a:t>
-                      </a:r>
-                    </a:p>
-                  </a:txBody>
-                  <a:tcPr anchor="ctr">
-                    <a:solidFill>
-                      <a:srgbClr val="F1F5F9"/>
-                    </a:solidFill>
-                  </a:tcPr>
-                </a:tc>
-                <a:tc>
-                  <a:txBody>
-                    <a:bodyPr/>
-                    <a:lstStyle/>
-                    <a:p>
-                      <a:r>
-                        <a:rPr sz="1200" b="0">
-                          <a:solidFill>
-                            <a:srgbClr val="0F172A"/>
-                          </a:solidFill>
-                          <a:latin typeface="Arial"/>
-                        </a:rPr>
-                        <a:t>2.3×</a:t>
-                      </a:r>
-                    </a:p>
-                  </a:txBody>
-                  <a:tcPr anchor="ctr">
-                    <a:solidFill>
-                      <a:srgbClr val="F1F5F9"/>
-                    </a:solidFill>
-                  </a:tcPr>
-                </a:tc>
-              </a:tr>
-              <a:tr h="457200">
-                <a:tc>
-                  <a:txBody>
-                    <a:bodyPr/>
-                    <a:lstStyle/>
-                    <a:p>
-                      <a:r>
-                        <a:rPr sz="1200" b="0">
-                          <a:solidFill>
-                            <a:srgbClr val="0F172A"/>
-                          </a:solidFill>
-                          <a:latin typeface="Arial"/>
-                        </a:rPr>
-                        <a:t>Travel class</a:t>
-                      </a:r>
-                    </a:p>
-                  </a:txBody>
-                  <a:tcPr anchor="ctr">
-                    <a:solidFill>
-                      <a:srgbClr val="FFFFFF"/>
-                    </a:solidFill>
-                  </a:tcPr>
-                </a:tc>
-                <a:tc>
-                  <a:txBody>
-                    <a:bodyPr/>
-                    <a:lstStyle/>
-                    <a:p>
-                      <a:r>
-                        <a:rPr sz="1200" b="0">
-                          <a:solidFill>
-                            <a:srgbClr val="0F172A"/>
-                          </a:solidFill>
-                          <a:latin typeface="Arial"/>
-                        </a:rPr>
-                        <a:t>2A 5.2%, 3A 8.6%, SL 12.5%, CC 33.6%</a:t>
-                      </a:r>
-                    </a:p>
-                  </a:txBody>
-                  <a:tcPr anchor="ctr">
-                    <a:solidFill>
-                      <a:srgbClr val="FFFFFF"/>
-                    </a:solidFill>
-                  </a:tcPr>
-                </a:tc>
-                <a:tc>
-                  <a:txBody>
-                    <a:bodyPr/>
-                    <a:lstStyle/>
-                    <a:p>
-                      <a:r>
-                        <a:rPr sz="1200" b="0">
-                          <a:solidFill>
-                            <a:srgbClr val="0F172A"/>
-                          </a:solidFill>
-                          <a:latin typeface="Arial"/>
-                        </a:rPr>
-                        <a:t>6.5×</a:t>
-                      </a:r>
-                    </a:p>
-                  </a:txBody>
-                  <a:tcPr anchor="ctr">
-                    <a:solidFill>
-                      <a:srgbClr val="FFFFFF"/>
-                    </a:solidFill>
-                  </a:tcPr>
-                </a:tc>
-              </a:tr>
-            </a:tbl>
-          </a:graphicData>
-        </a:graphic>
-      </p:graphicFrame>
-      <p:sp>
-        <p:nvSpPr>
-          <p:cNvPr id="7" name="TextBox 6"/>
+      <p:sp>
+        <p:nvSpPr>
+          <p:cNvPr id="6" name="TextBox 5"/>
           <p:cNvSpPr txBox="1"/>
           <p:nvPr/>
         </p:nvSpPr>
         <p:spPr>
           <a:xfrm>
-            <a:off x="658368" y="6126480"/>
-            <a:ext cx="10874959" cy="365760"/>
+            <a:off x="658368" y="1700784"/>
+            <a:ext cx="5486400" cy="3931920"/>
           </a:xfrm>
           <a:prstGeom prst="rect">
             <a:avLst/>
@@ -8628,17 +6643,200 @@
           <a:p>
             <a:pPr algn="l">
               <a:spcAft>
+                <a:spcPts val="600"/>
+              </a:spcAft>
+            </a:pPr>
+            <a:r>
+              <a:rPr sz="1800" b="1" i="0">
+                <a:solidFill>
+                  <a:srgbClr val="0F172A"/>
+                </a:solidFill>
+                <a:latin typeface="Arial"/>
+              </a:rPr>
+              <a:t>Trained only on verified real data</a:t>
+            </a:r>
+          </a:p>
+          <a:p>
+            <a:pPr>
+              <a:spcAft>
+                <a:spcPts val="1600"/>
+              </a:spcAft>
+            </a:pPr>
+            <a:r>
+              <a:rPr sz="1500" b="0" i="0">
+                <a:solidFill>
+                  <a:srgbClr val="64748B"/>
+                </a:solidFill>
+                <a:latin typeface="Arial"/>
+              </a:rPr>
+              <a:t>We audited three public datasets and used the one that held up. One was fabricated — sequential ticket numbers and impossible train and class combinations — so we discarded it.</a:t>
+            </a:r>
+          </a:p>
+          <a:p>
+            <a:pPr>
+              <a:spcAft>
+                <a:spcPts val="600"/>
+              </a:spcAft>
+            </a:pPr>
+            <a:r>
+              <a:rPr sz="1800" b="1" i="0">
+                <a:solidFill>
+                  <a:srgbClr val="0F172A"/>
+                </a:solidFill>
+                <a:latin typeface="Arial"/>
+              </a:rPr>
+              <a:t>We deleted our own first model too</a:t>
+            </a:r>
+          </a:p>
+          <a:p>
+            <a:pPr>
+              <a:spcAft>
                 <a:spcPts val="0"/>
               </a:spcAft>
             </a:pPr>
             <a:r>
-              <a:rPr sz="1100" b="0" i="1">
+              <a:rPr sz="1500" b="0" i="0">
                 <a:solidFill>
                   <a:srgbClr val="64748B"/>
                 </a:solidFill>
                 <a:latin typeface="Arial"/>
               </a:rPr>
-              <a:t>Across all 23 features in the benchmark dataset, current waitlist position ranks first by more than double the next feature.</a:t>
+              <a:t>It was trained on data we generated ourselves, which meant it could only re-learn our own assumptions. It would have scored well and known nothing.</a:t>
+            </a:r>
+          </a:p>
+        </p:txBody>
+      </p:sp>
+      <p:sp>
+        <p:nvSpPr>
+          <p:cNvPr id="7" name="TextBox 6"/>
+          <p:cNvSpPr txBox="1"/>
+          <p:nvPr/>
+        </p:nvSpPr>
+        <p:spPr>
+          <a:xfrm>
+            <a:off x="6601968" y="1700784"/>
+            <a:ext cx="4572000" cy="3931920"/>
+          </a:xfrm>
+          <a:prstGeom prst="rect">
+            <a:avLst/>
+          </a:prstGeom>
+          <a:noFill/>
+        </p:spPr>
+        <p:txBody>
+          <a:bodyPr wrap="square" anchor="t">
+            <a:spAutoFit/>
+          </a:bodyPr>
+          <a:lstStyle/>
+          <a:p>
+            <a:pPr algn="l">
+              <a:spcAft>
+                <a:spcPts val="1200"/>
+              </a:spcAft>
+            </a:pPr>
+            <a:r>
+              <a:rPr sz="1000" b="1" i="0">
+                <a:solidFill>
+                  <a:srgbClr val="0EA5E9"/>
+                </a:solidFill>
+                <a:latin typeface="Arial"/>
+              </a:rPr>
+              <a:t>WHAT THE MODEL READS</a:t>
+            </a:r>
+          </a:p>
+          <a:p>
+            <a:pPr>
+              <a:spcAft>
+                <a:spcPts val="1000"/>
+              </a:spcAft>
+            </a:pPr>
+            <a:r>
+              <a:rPr sz="1600" b="0" i="0">
+                <a:solidFill>
+                  <a:srgbClr val="0F172A"/>
+                </a:solidFill>
+                <a:latin typeface="Arial"/>
+              </a:rPr>
+              <a:t>•   Travel class</a:t>
+            </a:r>
+          </a:p>
+          <a:p>
+            <a:pPr>
+              <a:spcAft>
+                <a:spcPts val="1000"/>
+              </a:spcAft>
+            </a:pPr>
+            <a:r>
+              <a:rPr sz="1600" b="0" i="0">
+                <a:solidFill>
+                  <a:srgbClr val="0F172A"/>
+                </a:solidFill>
+                <a:latin typeface="Arial"/>
+              </a:rPr>
+              <a:t>•   Waitlist position when booked</a:t>
+            </a:r>
+          </a:p>
+          <a:p>
+            <a:pPr>
+              <a:spcAft>
+                <a:spcPts val="1000"/>
+              </a:spcAft>
+            </a:pPr>
+            <a:r>
+              <a:rPr sz="1600" b="0" i="0">
+                <a:solidFill>
+                  <a:srgbClr val="0F172A"/>
+                </a:solidFill>
+                <a:latin typeface="Arial"/>
+              </a:rPr>
+              <a:t>•   Current waitlist position</a:t>
+            </a:r>
+          </a:p>
+          <a:p>
+            <a:pPr>
+              <a:spcAft>
+                <a:spcPts val="1000"/>
+              </a:spcAft>
+            </a:pPr>
+            <a:r>
+              <a:rPr sz="1600" b="0" i="0">
+                <a:solidFill>
+                  <a:srgbClr val="0F172A"/>
+                </a:solidFill>
+                <a:latin typeface="Arial"/>
+              </a:rPr>
+              <a:t>•   Days until the journey</a:t>
+            </a:r>
+          </a:p>
+          <a:p>
+            <a:pPr>
+              <a:spcAft>
+                <a:spcPts val="1400"/>
+              </a:spcAft>
+            </a:pPr>
+            <a:r>
+              <a:rPr sz="1400" b="0" i="0">
+                <a:solidFill>
+                  <a:srgbClr val="64748B"/>
+                </a:solidFill>
+                <a:latin typeface="Arial"/>
+              </a:rPr>
+              <a:t>Every input comes straight from the ticket lookup. Nothing is estimated, and nothing is used in training that the live system cannot actually obtain.</a:t>
+            </a:r>
+          </a:p>
+          <a:p>
+            <a:pPr>
+              <a:spcAft>
+                <a:spcPts val="0"/>
+              </a:spcAft>
+            </a:pPr>
+            <a:r>
+              <a:rPr sz="1400" b="0" i="0">
+                <a:solidFill>
+                  <a:srgbClr val="64748B"/>
+                </a:solidFill>
+                <a:latin typeface="Arial"/>
+              </a:rPr>
+              <a:t>Delay behaviour per train and per route feeds the connection risk separately.</a:t>
             </a:r>
           </a:p>
         </p:txBody>
@@ -8739,7 +6937,7 @@
                 </a:solidFill>
                 <a:latin typeface="Arial"/>
               </a:rPr>
-              <a:t>BENCHMARKED AGAINST A 23-FEATURE CEILING</a:t>
+              <a:t>ENGINEERING</a:t>
             </a:r>
           </a:p>
         </p:txBody>
@@ -8778,7 +6976,7 @@
                 </a:solidFill>
                 <a:latin typeface="Arial"/>
               </a:rPr>
-              <a:t>Results</a:t>
+              <a:t>Built and deployed</a:t>
             </a:r>
           </a:p>
         </p:txBody>
@@ -8829,60 +7027,14 @@
       </p:sp>
       <p:sp>
         <p:nvSpPr>
-          <p:cNvPr id="6" name="Rounded Rectangle 5"/>
-          <p:cNvSpPr/>
-          <p:nvPr/>
-        </p:nvSpPr>
-        <p:spPr>
-          <a:xfrm>
-            <a:off x="658368" y="1929384"/>
-            <a:ext cx="3466490" cy="1554480"/>
-          </a:xfrm>
-          <a:prstGeom prst="roundRect">
-            <a:avLst>
-              <a:gd name="adj" fmla="val 6000"/>
-            </a:avLst>
-          </a:prstGeom>
-          <a:solidFill>
-            <a:srgbClr val="F1F5F9"/>
-          </a:solidFill>
-          <a:ln>
-            <a:noFill/>
-          </a:ln>
-          <a:effectLst/>
-        </p:spPr>
-        <p:style>
-          <a:lnRef idx="1">
-            <a:schemeClr val="accent1"/>
-          </a:lnRef>
-          <a:fillRef idx="3">
-            <a:schemeClr val="accent1"/>
-          </a:fillRef>
-          <a:effectRef idx="2">
-            <a:schemeClr val="accent1"/>
-          </a:effectRef>
-          <a:fontRef idx="minor">
-            <a:schemeClr val="lt1"/>
-          </a:fontRef>
-        </p:style>
-        <p:txBody>
-          <a:bodyPr rtlCol="0" anchor="ctr"/>
-          <a:lstStyle/>
-          <a:p>
-            <a:pPr algn="ctr"/>
-          </a:p>
-        </p:txBody>
-      </p:sp>
-      <p:sp>
-        <p:nvSpPr>
-          <p:cNvPr id="7" name="TextBox 6"/>
+          <p:cNvPr id="6" name="TextBox 5"/>
           <p:cNvSpPr txBox="1"/>
           <p:nvPr/>
         </p:nvSpPr>
         <p:spPr>
           <a:xfrm>
-            <a:off x="658368" y="2148840"/>
-            <a:ext cx="3466490" cy="640080"/>
+            <a:off x="658368" y="1700784"/>
+            <a:ext cx="10874959" cy="4334256"/>
           </a:xfrm>
           <a:prstGeom prst="rect">
             <a:avLst/>
@@ -8895,400 +7047,131 @@
           </a:bodyPr>
           <a:lstStyle/>
           <a:p>
-            <a:pPr algn="ctr">
-              <a:spcAft>
-                <a:spcPts val="0"/>
-              </a:spcAft>
-            </a:pPr>
-            <a:r>
-              <a:rPr sz="3000" b="1" i="0">
+            <a:pPr algn="l">
+              <a:spcAft>
+                <a:spcPts val="300"/>
+              </a:spcAft>
+            </a:pPr>
+            <a:r>
+              <a:rPr sz="1900" b="1" i="0">
+                <a:solidFill>
+                  <a:srgbClr val="0F172A"/>
+                </a:solidFill>
+                <a:latin typeface="Arial"/>
+              </a:rPr>
+              <a:t>Backend  ·  Python, FastAPI, scikit-learn</a:t>
+            </a:r>
+          </a:p>
+          <a:p>
+            <a:pPr>
+              <a:spcAft>
+                <a:spcPts val="1700"/>
+              </a:spcAft>
+            </a:pPr>
+            <a:r>
+              <a:rPr sz="1500" b="0" i="0">
                 <a:solidFill>
                   <a:srgbClr val="64748B"/>
                 </a:solidFill>
                 <a:latin typeface="Arial"/>
               </a:rPr>
-              <a:t>0.500</a:t>
-            </a:r>
-          </a:p>
-        </p:txBody>
-      </p:sp>
-      <p:sp>
-        <p:nvSpPr>
-          <p:cNvPr id="8" name="TextBox 7"/>
-          <p:cNvSpPr txBox="1"/>
-          <p:nvPr/>
-        </p:nvSpPr>
-        <p:spPr>
-          <a:xfrm>
-            <a:off x="749808" y="2798064"/>
-            <a:ext cx="3283610" cy="457200"/>
-          </a:xfrm>
-          <a:prstGeom prst="rect">
-            <a:avLst/>
-          </a:prstGeom>
-          <a:noFill/>
-        </p:spPr>
-        <p:txBody>
-          <a:bodyPr wrap="square" anchor="t">
-            <a:spAutoFit/>
-          </a:bodyPr>
-          <a:lstStyle/>
-          <a:p>
-            <a:pPr algn="ctr">
-              <a:spcAft>
-                <a:spcPts val="0"/>
-              </a:spcAft>
-            </a:pPr>
-            <a:r>
-              <a:rPr sz="1100" b="0" i="0">
+              <a:t>A REST API serving predictions, with an endpoint that publishes the model's own provenance so its numbers can be verified against the running service.</a:t>
+            </a:r>
+          </a:p>
+          <a:p>
+            <a:pPr>
+              <a:spcAft>
+                <a:spcPts val="300"/>
+              </a:spcAft>
+            </a:pPr>
+            <a:r>
+              <a:rPr sz="1900" b="1" i="0">
+                <a:solidFill>
+                  <a:srgbClr val="0F172A"/>
+                </a:solidFill>
+                <a:latin typeface="Arial"/>
+              </a:rPr>
+              <a:t>Web  ·  HTML, CSS, JavaScript</a:t>
+            </a:r>
+          </a:p>
+          <a:p>
+            <a:pPr>
+              <a:spcAft>
+                <a:spcPts val="1700"/>
+              </a:spcAft>
+            </a:pPr>
+            <a:r>
+              <a:rPr sz="1500" b="0" i="0">
                 <a:solidFill>
                   <a:srgbClr val="64748B"/>
                 </a:solidFill>
                 <a:latin typeface="Arial"/>
               </a:rPr>
-              <a:t>RANDOM BASELINE</a:t>
-            </a:r>
-          </a:p>
-        </p:txBody>
-      </p:sp>
-      <p:sp>
-        <p:nvSpPr>
-          <p:cNvPr id="9" name="Rounded Rectangle 8"/>
-          <p:cNvSpPr/>
-          <p:nvPr/>
-        </p:nvSpPr>
-        <p:spPr>
-          <a:xfrm>
-            <a:off x="4362602" y="1929384"/>
-            <a:ext cx="3466490" cy="1554480"/>
-          </a:xfrm>
-          <a:prstGeom prst="roundRect">
-            <a:avLst>
-              <a:gd name="adj" fmla="val 6000"/>
-            </a:avLst>
-          </a:prstGeom>
-          <a:solidFill>
-            <a:srgbClr val="F1F5F9"/>
-          </a:solidFill>
-          <a:ln>
-            <a:noFill/>
-          </a:ln>
-          <a:effectLst/>
-        </p:spPr>
-        <p:style>
-          <a:lnRef idx="1">
-            <a:schemeClr val="accent1"/>
-          </a:lnRef>
-          <a:fillRef idx="3">
-            <a:schemeClr val="accent1"/>
-          </a:fillRef>
-          <a:effectRef idx="2">
-            <a:schemeClr val="accent1"/>
-          </a:effectRef>
-          <a:fontRef idx="minor">
-            <a:schemeClr val="lt1"/>
-          </a:fontRef>
-        </p:style>
-        <p:txBody>
-          <a:bodyPr rtlCol="0" anchor="ctr"/>
-          <a:lstStyle/>
-          <a:p>
-            <a:pPr algn="ctr"/>
-          </a:p>
-        </p:txBody>
-      </p:sp>
-      <p:sp>
-        <p:nvSpPr>
-          <p:cNvPr id="10" name="TextBox 9"/>
-          <p:cNvSpPr txBox="1"/>
-          <p:nvPr/>
-        </p:nvSpPr>
-        <p:spPr>
-          <a:xfrm>
-            <a:off x="4362602" y="2148840"/>
-            <a:ext cx="3466490" cy="640080"/>
-          </a:xfrm>
-          <a:prstGeom prst="rect">
-            <a:avLst/>
-          </a:prstGeom>
-          <a:noFill/>
-        </p:spPr>
-        <p:txBody>
-          <a:bodyPr wrap="square" anchor="t">
-            <a:spAutoFit/>
-          </a:bodyPr>
-          <a:lstStyle/>
-          <a:p>
-            <a:pPr algn="ctr">
-              <a:spcAft>
-                <a:spcPts val="0"/>
-              </a:spcAft>
-            </a:pPr>
-            <a:r>
-              <a:rPr sz="3000" b="1" i="0">
-                <a:solidFill>
-                  <a:srgbClr val="0EA5E9"/>
-                </a:solidFill>
-                <a:latin typeface="Arial"/>
-              </a:rPr>
-              <a:t>0.796</a:t>
-            </a:r>
-          </a:p>
-        </p:txBody>
-      </p:sp>
-      <p:sp>
-        <p:nvSpPr>
-          <p:cNvPr id="11" name="TextBox 10"/>
-          <p:cNvSpPr txBox="1"/>
-          <p:nvPr/>
-        </p:nvSpPr>
-        <p:spPr>
-          <a:xfrm>
-            <a:off x="4454042" y="2798064"/>
-            <a:ext cx="3283610" cy="457200"/>
-          </a:xfrm>
-          <a:prstGeom prst="rect">
-            <a:avLst/>
-          </a:prstGeom>
-          <a:noFill/>
-        </p:spPr>
-        <p:txBody>
-          <a:bodyPr wrap="square" anchor="t">
-            <a:spAutoFit/>
-          </a:bodyPr>
-          <a:lstStyle/>
-          <a:p>
-            <a:pPr algn="ctr">
-              <a:spcAft>
-                <a:spcPts val="0"/>
-              </a:spcAft>
-            </a:pPr>
-            <a:r>
-              <a:rPr sz="1100" b="0" i="0">
+              <a:t>No build step. Detects whether it is running locally or deployed and selects the right API automatically.</a:t>
+            </a:r>
+          </a:p>
+          <a:p>
+            <a:pPr>
+              <a:spcAft>
+                <a:spcPts val="300"/>
+              </a:spcAft>
+            </a:pPr>
+            <a:r>
+              <a:rPr sz="1900" b="1" i="0">
+                <a:solidFill>
+                  <a:srgbClr val="0F172A"/>
+                </a:solidFill>
+                <a:latin typeface="Arial"/>
+              </a:rPr>
+              <a:t>Mobile  ·  React Native via Expo</a:t>
+            </a:r>
+          </a:p>
+          <a:p>
+            <a:pPr>
+              <a:spcAft>
+                <a:spcPts val="1700"/>
+              </a:spcAft>
+            </a:pPr>
+            <a:r>
+              <a:rPr sz="1500" b="0" i="0">
                 <a:solidFill>
                   <a:srgbClr val="64748B"/>
                 </a:solidFill>
                 <a:latin typeface="Arial"/>
               </a:rPr>
-              <a:t>OUR MODEL  ·  4 INPUTS  ·  LIVE</a:t>
-            </a:r>
-          </a:p>
-        </p:txBody>
-      </p:sp>
-      <p:sp>
-        <p:nvSpPr>
-          <p:cNvPr id="12" name="Rounded Rectangle 11"/>
-          <p:cNvSpPr/>
-          <p:nvPr/>
-        </p:nvSpPr>
-        <p:spPr>
-          <a:xfrm>
-            <a:off x="8066836" y="1929384"/>
-            <a:ext cx="3466490" cy="1554480"/>
-          </a:xfrm>
-          <a:prstGeom prst="roundRect">
-            <a:avLst>
-              <a:gd name="adj" fmla="val 6000"/>
-            </a:avLst>
-          </a:prstGeom>
-          <a:solidFill>
-            <a:srgbClr val="F1F5F9"/>
-          </a:solidFill>
-          <a:ln>
-            <a:noFill/>
-          </a:ln>
-          <a:effectLst/>
-        </p:spPr>
-        <p:style>
-          <a:lnRef idx="1">
-            <a:schemeClr val="accent1"/>
-          </a:lnRef>
-          <a:fillRef idx="3">
-            <a:schemeClr val="accent1"/>
-          </a:fillRef>
-          <a:effectRef idx="2">
-            <a:schemeClr val="accent1"/>
-          </a:effectRef>
-          <a:fontRef idx="minor">
-            <a:schemeClr val="lt1"/>
-          </a:fontRef>
-        </p:style>
-        <p:txBody>
-          <a:bodyPr rtlCol="0" anchor="ctr"/>
-          <a:lstStyle/>
-          <a:p>
-            <a:pPr algn="ctr"/>
-          </a:p>
-        </p:txBody>
-      </p:sp>
-      <p:sp>
-        <p:nvSpPr>
-          <p:cNvPr id="13" name="TextBox 12"/>
-          <p:cNvSpPr txBox="1"/>
-          <p:nvPr/>
-        </p:nvSpPr>
-        <p:spPr>
-          <a:xfrm>
-            <a:off x="8066836" y="2148840"/>
-            <a:ext cx="3466490" cy="640080"/>
-          </a:xfrm>
-          <a:prstGeom prst="rect">
-            <a:avLst/>
-          </a:prstGeom>
-          <a:noFill/>
-        </p:spPr>
-        <p:txBody>
-          <a:bodyPr wrap="square" anchor="t">
-            <a:spAutoFit/>
-          </a:bodyPr>
-          <a:lstStyle/>
-          <a:p>
-            <a:pPr algn="ctr">
-              <a:spcAft>
-                <a:spcPts val="0"/>
-              </a:spcAft>
-            </a:pPr>
-            <a:r>
-              <a:rPr sz="3000" b="1" i="0">
+              <a:t>The same journey flow on a phone, pointed at the same deployed API.</a:t>
+            </a:r>
+          </a:p>
+          <a:p>
+            <a:pPr>
+              <a:spcAft>
+                <a:spcPts val="300"/>
+              </a:spcAft>
+            </a:pPr>
+            <a:r>
+              <a:rPr sz="1900" b="1" i="0">
                 <a:solidFill>
                   <a:srgbClr val="0F172A"/>
                 </a:solidFill>
                 <a:latin typeface="Arial"/>
               </a:rPr>
-              <a:t>0.945</a:t>
-            </a:r>
-          </a:p>
-        </p:txBody>
-      </p:sp>
-      <p:sp>
-        <p:nvSpPr>
-          <p:cNvPr id="14" name="TextBox 13"/>
-          <p:cNvSpPr txBox="1"/>
-          <p:nvPr/>
-        </p:nvSpPr>
-        <p:spPr>
-          <a:xfrm>
-            <a:off x="8158276" y="2798064"/>
-            <a:ext cx="3283610" cy="457200"/>
-          </a:xfrm>
-          <a:prstGeom prst="rect">
-            <a:avLst/>
-          </a:prstGeom>
-          <a:noFill/>
-        </p:spPr>
-        <p:txBody>
-          <a:bodyPr wrap="square" anchor="t">
-            <a:spAutoFit/>
-          </a:bodyPr>
-          <a:lstStyle/>
-          <a:p>
-            <a:pPr algn="ctr">
-              <a:spcAft>
-                <a:spcPts val="0"/>
-              </a:spcAft>
-            </a:pPr>
-            <a:r>
-              <a:rPr sz="1100" b="0" i="0">
+              <a:t>Hosting  ·  Vercel and Render, deployed from GitHub</a:t>
+            </a:r>
+          </a:p>
+          <a:p>
+            <a:pPr>
+              <a:spcAft>
+                <a:spcPts val="1700"/>
+              </a:spcAft>
+            </a:pPr>
+            <a:r>
+              <a:rPr sz="1500" b="0" i="0">
                 <a:solidFill>
                   <a:srgbClr val="64748B"/>
                 </a:solidFill>
                 <a:latin typeface="Arial"/>
               </a:rPr>
-              <a:t>CEILING  ·  23 FEATURES</a:t>
-            </a:r>
-          </a:p>
-        </p:txBody>
-      </p:sp>
-      <p:sp>
-        <p:nvSpPr>
-          <p:cNvPr id="15" name="TextBox 14"/>
-          <p:cNvSpPr txBox="1"/>
-          <p:nvPr/>
-        </p:nvSpPr>
-        <p:spPr>
-          <a:xfrm>
-            <a:off x="658368" y="3758184"/>
-            <a:ext cx="10874959" cy="2011680"/>
-          </a:xfrm>
-          <a:prstGeom prst="rect">
-            <a:avLst/>
-          </a:prstGeom>
-          <a:noFill/>
-        </p:spPr>
-        <p:txBody>
-          <a:bodyPr wrap="square" anchor="t">
-            <a:spAutoFit/>
-          </a:bodyPr>
-          <a:lstStyle/>
-          <a:p>
-            <a:pPr algn="l">
-              <a:spcAft>
-                <a:spcPts val="1400"/>
-              </a:spcAft>
-            </a:pPr>
-            <a:r>
-              <a:rPr sz="2100" b="1" i="0">
-                <a:solidFill>
-                  <a:srgbClr val="0F172A"/>
-                </a:solidFill>
-                <a:latin typeface="Arial"/>
-              </a:rPr>
-              <a:t>We reach 66% of the achievable signal above random, using 4 inputs instead of 23.</a:t>
-            </a:r>
-          </a:p>
-          <a:p>
-            <a:pPr>
-              <a:spcAft>
-                <a:spcPts val="0"/>
-              </a:spcAft>
-            </a:pPr>
-            <a:r>
-              <a:rPr sz="1500" b="0" i="0">
-                <a:solidFill>
-                  <a:srgbClr val="64748B"/>
-                </a:solidFill>
-                <a:latin typeface="Arial"/>
-              </a:rPr>
-              <a:t>The 23-feature dataset encodes waitlist position as a fraction of a denominator it does not publish, so it cannot accept a real PNR. We tested a statistical workaround and it scored 0.480 — worse than a coin flip. It stays a benchmark, and we ship the model that actually reads live data.</a:t>
-            </a:r>
-          </a:p>
-        </p:txBody>
-      </p:sp>
-      <p:sp>
-        <p:nvSpPr>
-          <p:cNvPr id="16" name="TextBox 15"/>
-          <p:cNvSpPr txBox="1"/>
-          <p:nvPr/>
-        </p:nvSpPr>
-        <p:spPr>
-          <a:xfrm>
-            <a:off x="658368" y="6126480"/>
-            <a:ext cx="10874959" cy="365760"/>
-          </a:xfrm>
-          <a:prstGeom prst="rect">
-            <a:avLst/>
-          </a:prstGeom>
-          <a:noFill/>
-        </p:spPr>
-        <p:txBody>
-          <a:bodyPr wrap="square" anchor="t">
-            <a:spAutoFit/>
-          </a:bodyPr>
-          <a:lstStyle/>
-          <a:p>
-            <a:pPr algn="l">
-              <a:spcAft>
-                <a:spcPts val="0"/>
-              </a:spcAft>
-            </a:pPr>
-            <a:r>
-              <a:rPr sz="1100" b="0" i="1">
-                <a:solidFill>
-                  <a:srgbClr val="64748B"/>
-                </a:solidFill>
-                <a:latin typeface="Arial"/>
-              </a:rPr>
-              <a:t>Every figure reproducible with  python analysis/benchmark.py</a:t>
+              <a:t>Live and publicly reachable, with slow cold starts surfaced to the user instead of leaving a frozen screen.</a:t>
             </a:r>
           </a:p>
         </p:txBody>
@@ -9326,7 +7209,7 @@
             <a:avLst/>
           </a:prstGeom>
           <a:solidFill>
-            <a:srgbClr val="0F172A"/>
+            <a:srgbClr val="FFFFFF"/>
           </a:solidFill>
           <a:ln>
             <a:noFill/>
@@ -9363,8 +7246,8 @@
         </p:nvSpPr>
         <p:spPr>
           <a:xfrm>
-            <a:off x="658368" y="2286000"/>
-            <a:ext cx="1828800" cy="1097280"/>
+            <a:off x="658368" y="457200"/>
+            <a:ext cx="10874959" cy="274320"/>
           </a:xfrm>
           <a:prstGeom prst="rect">
             <a:avLst/>
@@ -9383,27 +7266,66 @@
               </a:spcAft>
             </a:pPr>
             <a:r>
-              <a:rPr sz="6400" b="1" i="0">
-                <a:solidFill>
-                  <a:srgbClr val="1E293B"/>
-                </a:solidFill>
-                <a:latin typeface="Arial"/>
-              </a:rPr>
-              <a:t>02</a:t>
-            </a:r>
-          </a:p>
-        </p:txBody>
-      </p:sp>
-      <p:sp>
-        <p:nvSpPr>
-          <p:cNvPr id="4" name="Rectangle 3"/>
+              <a:rPr sz="1100" b="1" i="0">
+                <a:solidFill>
+                  <a:srgbClr val="64748B"/>
+                </a:solidFill>
+                <a:latin typeface="Arial"/>
+              </a:rPr>
+              <a:t>IMPACT</a:t>
+            </a:r>
+          </a:p>
+        </p:txBody>
+      </p:sp>
+      <p:sp>
+        <p:nvSpPr>
+          <p:cNvPr id="4" name="TextBox 3"/>
+          <p:cNvSpPr txBox="1"/>
+          <p:nvPr/>
+        </p:nvSpPr>
+        <p:spPr>
+          <a:xfrm>
+            <a:off x="658368" y="768096"/>
+            <a:ext cx="10874959" cy="548640"/>
+          </a:xfrm>
+          <a:prstGeom prst="rect">
+            <a:avLst/>
+          </a:prstGeom>
+          <a:noFill/>
+        </p:spPr>
+        <p:txBody>
+          <a:bodyPr wrap="square" anchor="t">
+            <a:spAutoFit/>
+          </a:bodyPr>
+          <a:lstStyle/>
+          <a:p>
+            <a:pPr algn="l">
+              <a:spcAft>
+                <a:spcPts val="0"/>
+              </a:spcAft>
+            </a:pPr>
+            <a:r>
+              <a:rPr sz="3000" b="1" i="0">
+                <a:solidFill>
+                  <a:srgbClr val="0F172A"/>
+                </a:solidFill>
+                <a:latin typeface="Arial"/>
+              </a:rPr>
+              <a:t>Why it matters</a:t>
+            </a:r>
+          </a:p>
+        </p:txBody>
+      </p:sp>
+      <p:sp>
+        <p:nvSpPr>
+          <p:cNvPr id="5" name="Rectangle 4"/>
           <p:cNvSpPr/>
           <p:nvPr/>
         </p:nvSpPr>
         <p:spPr>
           <a:xfrm>
-            <a:off x="658368" y="3063240"/>
-            <a:ext cx="1463040" cy="38100"/>
+            <a:off x="658368" y="1371600"/>
+            <a:ext cx="1005840" cy="38100"/>
           </a:xfrm>
           <a:prstGeom prst="rect">
             <a:avLst/>
@@ -9440,14 +7362,104 @@
       </p:sp>
       <p:sp>
         <p:nvSpPr>
-          <p:cNvPr id="5" name="TextBox 4"/>
+          <p:cNvPr id="6" name="Rounded Rectangle 5"/>
+          <p:cNvSpPr/>
+          <p:nvPr/>
+        </p:nvSpPr>
+        <p:spPr>
+          <a:xfrm>
+            <a:off x="658368" y="1883664"/>
+            <a:ext cx="5300319" cy="1828800"/>
+          </a:xfrm>
+          <a:prstGeom prst="roundRect">
+            <a:avLst>
+              <a:gd name="adj" fmla="val 5000"/>
+            </a:avLst>
+          </a:prstGeom>
+          <a:solidFill>
+            <a:srgbClr val="F1F5F9"/>
+          </a:solidFill>
+          <a:ln>
+            <a:noFill/>
+          </a:ln>
+          <a:effectLst/>
+        </p:spPr>
+        <p:style>
+          <a:lnRef idx="1">
+            <a:schemeClr val="accent1"/>
+          </a:lnRef>
+          <a:fillRef idx="3">
+            <a:schemeClr val="accent1"/>
+          </a:fillRef>
+          <a:effectRef idx="2">
+            <a:schemeClr val="accent1"/>
+          </a:effectRef>
+          <a:fontRef idx="minor">
+            <a:schemeClr val="lt1"/>
+          </a:fontRef>
+        </p:style>
+        <p:txBody>
+          <a:bodyPr rtlCol="0" anchor="ctr"/>
+          <a:lstStyle/>
+          <a:p>
+            <a:pPr algn="ctr"/>
+          </a:p>
+        </p:txBody>
+      </p:sp>
+      <p:sp>
+        <p:nvSpPr>
+          <p:cNvPr id="7" name="Rectangle 6"/>
+          <p:cNvSpPr/>
+          <p:nvPr/>
+        </p:nvSpPr>
+        <p:spPr>
+          <a:xfrm>
+            <a:off x="658368" y="1883664"/>
+            <a:ext cx="50800" cy="1828800"/>
+          </a:xfrm>
+          <a:prstGeom prst="rect">
+            <a:avLst/>
+          </a:prstGeom>
+          <a:solidFill>
+            <a:srgbClr val="0EA5E9"/>
+          </a:solidFill>
+          <a:ln>
+            <a:noFill/>
+          </a:ln>
+          <a:effectLst/>
+        </p:spPr>
+        <p:style>
+          <a:lnRef idx="1">
+            <a:schemeClr val="accent1"/>
+          </a:lnRef>
+          <a:fillRef idx="3">
+            <a:schemeClr val="accent1"/>
+          </a:fillRef>
+          <a:effectRef idx="2">
+            <a:schemeClr val="accent1"/>
+          </a:effectRef>
+          <a:fontRef idx="minor">
+            <a:schemeClr val="lt1"/>
+          </a:fontRef>
+        </p:style>
+        <p:txBody>
+          <a:bodyPr rtlCol="0" anchor="ctr"/>
+          <a:lstStyle/>
+          <a:p>
+            <a:pPr algn="ctr"/>
+          </a:p>
+        </p:txBody>
+      </p:sp>
+      <p:sp>
+        <p:nvSpPr>
+          <p:cNvPr id="8" name="TextBox 7"/>
           <p:cNvSpPr txBox="1"/>
           <p:nvPr/>
         </p:nvSpPr>
         <p:spPr>
           <a:xfrm>
-            <a:off x="658368" y="3200400"/>
-            <a:ext cx="9601200" cy="1463040"/>
+            <a:off x="987552" y="2157984"/>
+            <a:ext cx="4641951" cy="1371600"/>
           </a:xfrm>
           <a:prstGeom prst="rect">
             <a:avLst/>
@@ -9462,17 +7474,17 @@
           <a:p>
             <a:pPr algn="l">
               <a:spcAft>
-                <a:spcPts val="600"/>
-              </a:spcAft>
-            </a:pPr>
-            <a:r>
-              <a:rPr sz="4000" b="1" i="0">
-                <a:solidFill>
-                  <a:srgbClr val="FFFFFF"/>
-                </a:solidFill>
-                <a:latin typeface="Arial"/>
-              </a:rPr>
-              <a:t>Connecting journeys</a:t>
+                <a:spcPts val="800"/>
+              </a:spcAft>
+            </a:pPr>
+            <a:r>
+              <a:rPr sz="2100" b="1" i="0">
+                <a:solidFill>
+                  <a:srgbClr val="0F172A"/>
+                </a:solidFill>
+                <a:latin typeface="Arial"/>
+              </a:rPr>
+              <a:t>For passengers</a:t>
             </a:r>
           </a:p>
           <a:p>
@@ -9482,13 +7494,213 @@
               </a:spcAft>
             </a:pPr>
             <a:r>
-              <a:rPr sz="1600" b="0" i="0">
-                <a:solidFill>
-                  <a:srgbClr val="94A3B8"/>
-                </a:solidFill>
-                <a:latin typeface="Arial"/>
-              </a:rPr>
-              <a:t>Using historical delay data to score the risk of missing your next train</a:t>
+              <a:rPr sz="1500" b="0" i="0">
+                <a:solidFill>
+                  <a:srgbClr val="64748B"/>
+                </a:solidFill>
+                <a:latin typeface="Arial"/>
+              </a:rPr>
+              <a:t>Decide with a number instead of a guess. Know whether to hold a ticket, whether a connection is realistic, and how much time to leave at a junction.</a:t>
+            </a:r>
+          </a:p>
+        </p:txBody>
+      </p:sp>
+      <p:sp>
+        <p:nvSpPr>
+          <p:cNvPr id="9" name="Rounded Rectangle 8"/>
+          <p:cNvSpPr/>
+          <p:nvPr/>
+        </p:nvSpPr>
+        <p:spPr>
+          <a:xfrm>
+            <a:off x="6233007" y="1883664"/>
+            <a:ext cx="5300319" cy="1828800"/>
+          </a:xfrm>
+          <a:prstGeom prst="roundRect">
+            <a:avLst>
+              <a:gd name="adj" fmla="val 5000"/>
+            </a:avLst>
+          </a:prstGeom>
+          <a:solidFill>
+            <a:srgbClr val="F1F5F9"/>
+          </a:solidFill>
+          <a:ln>
+            <a:noFill/>
+          </a:ln>
+          <a:effectLst/>
+        </p:spPr>
+        <p:style>
+          <a:lnRef idx="1">
+            <a:schemeClr val="accent1"/>
+          </a:lnRef>
+          <a:fillRef idx="3">
+            <a:schemeClr val="accent1"/>
+          </a:fillRef>
+          <a:effectRef idx="2">
+            <a:schemeClr val="accent1"/>
+          </a:effectRef>
+          <a:fontRef idx="minor">
+            <a:schemeClr val="lt1"/>
+          </a:fontRef>
+        </p:style>
+        <p:txBody>
+          <a:bodyPr rtlCol="0" anchor="ctr"/>
+          <a:lstStyle/>
+          <a:p>
+            <a:pPr algn="ctr"/>
+          </a:p>
+        </p:txBody>
+      </p:sp>
+      <p:sp>
+        <p:nvSpPr>
+          <p:cNvPr id="10" name="Rectangle 9"/>
+          <p:cNvSpPr/>
+          <p:nvPr/>
+        </p:nvSpPr>
+        <p:spPr>
+          <a:xfrm>
+            <a:off x="6233007" y="1883664"/>
+            <a:ext cx="50800" cy="1828800"/>
+          </a:xfrm>
+          <a:prstGeom prst="rect">
+            <a:avLst/>
+          </a:prstGeom>
+          <a:solidFill>
+            <a:srgbClr val="059669"/>
+          </a:solidFill>
+          <a:ln>
+            <a:noFill/>
+          </a:ln>
+          <a:effectLst/>
+        </p:spPr>
+        <p:style>
+          <a:lnRef idx="1">
+            <a:schemeClr val="accent1"/>
+          </a:lnRef>
+          <a:fillRef idx="3">
+            <a:schemeClr val="accent1"/>
+          </a:fillRef>
+          <a:effectRef idx="2">
+            <a:schemeClr val="accent1"/>
+          </a:effectRef>
+          <a:fontRef idx="minor">
+            <a:schemeClr val="lt1"/>
+          </a:fontRef>
+        </p:style>
+        <p:txBody>
+          <a:bodyPr rtlCol="0" anchor="ctr"/>
+          <a:lstStyle/>
+          <a:p>
+            <a:pPr algn="ctr"/>
+          </a:p>
+        </p:txBody>
+      </p:sp>
+      <p:sp>
+        <p:nvSpPr>
+          <p:cNvPr id="11" name="TextBox 10"/>
+          <p:cNvSpPr txBox="1"/>
+          <p:nvPr/>
+        </p:nvSpPr>
+        <p:spPr>
+          <a:xfrm>
+            <a:off x="6562191" y="2157984"/>
+            <a:ext cx="4641951" cy="1371600"/>
+          </a:xfrm>
+          <a:prstGeom prst="rect">
+            <a:avLst/>
+          </a:prstGeom>
+          <a:noFill/>
+        </p:spPr>
+        <p:txBody>
+          <a:bodyPr wrap="square" anchor="t">
+            <a:spAutoFit/>
+          </a:bodyPr>
+          <a:lstStyle/>
+          <a:p>
+            <a:pPr algn="l">
+              <a:spcAft>
+                <a:spcPts val="800"/>
+              </a:spcAft>
+            </a:pPr>
+            <a:r>
+              <a:rPr sz="2100" b="1" i="0">
+                <a:solidFill>
+                  <a:srgbClr val="0F172A"/>
+                </a:solidFill>
+                <a:latin typeface="Arial"/>
+              </a:rPr>
+              <a:t>For the railway</a:t>
+            </a:r>
+          </a:p>
+          <a:p>
+            <a:pPr>
+              <a:spcAft>
+                <a:spcPts val="0"/>
+              </a:spcAft>
+            </a:pPr>
+            <a:r>
+              <a:rPr sz="1500" b="0" i="0">
+                <a:solidFill>
+                  <a:srgbClr val="64748B"/>
+                </a:solidFill>
+                <a:latin typeface="Arial"/>
+              </a:rPr>
+              <a:t>See transfers that are currently invisible. Turn a missed connection from something discovered afterwards into a decision that can be made in time.</a:t>
+            </a:r>
+          </a:p>
+        </p:txBody>
+      </p:sp>
+      <p:sp>
+        <p:nvSpPr>
+          <p:cNvPr id="12" name="TextBox 11"/>
+          <p:cNvSpPr txBox="1"/>
+          <p:nvPr/>
+        </p:nvSpPr>
+        <p:spPr>
+          <a:xfrm>
+            <a:off x="658368" y="4078224"/>
+            <a:ext cx="10874959" cy="1463040"/>
+          </a:xfrm>
+          <a:prstGeom prst="rect">
+            <a:avLst/>
+          </a:prstGeom>
+          <a:noFill/>
+        </p:spPr>
+        <p:txBody>
+          <a:bodyPr wrap="square" anchor="t">
+            <a:spAutoFit/>
+          </a:bodyPr>
+          <a:lstStyle/>
+          <a:p>
+            <a:pPr algn="l">
+              <a:spcAft>
+                <a:spcPts val="1000"/>
+              </a:spcAft>
+            </a:pPr>
+            <a:r>
+              <a:rPr sz="1900" b="1" i="0">
+                <a:solidFill>
+                  <a:srgbClr val="0F172A"/>
+                </a:solidFill>
+                <a:latin typeface="Arial"/>
+              </a:rPr>
+              <a:t>The same prediction that helps one passenger decide, aggregated across everyone on the train, becomes an operational signal for the railway.</a:t>
+            </a:r>
+          </a:p>
+          <a:p>
+            <a:pPr>
+              <a:spcAft>
+                <a:spcPts val="0"/>
+              </a:spcAft>
+            </a:pPr>
+            <a:r>
+              <a:rPr sz="1500" b="0" i="0">
+                <a:solidFill>
+                  <a:srgbClr val="64748B"/>
+                </a:solidFill>
+                <a:latin typeface="Arial"/>
+              </a:rPr>
+              <a:t>That is why these are one system and not four features — each capability is built on the one before it.</a:t>
             </a:r>
           </a:p>
         </p:txBody>
